--- a/DTDC_Analysis.ppt.pptx
+++ b/DTDC_Analysis.ppt.pptx
@@ -34,7 +34,7 @@
   <p:notesSz cx="6858000" cy="9144000"/>
   <p:embeddedFontLst>
     <p:embeddedFont>
-      <p:font typeface="Poppins" charset="0"/>
+      <p:font typeface="Poppins" panose="020B0502040204020203" pitchFamily="2" charset="0"/>
       <p:regular r:id="rId24"/>
       <p:bold r:id="rId25"/>
       <p:italic r:id="rId26"/>
@@ -270,6 +270,22 @@
       </a:defRPr>
     </a:lvl9pPr>
   </p:defaultTextStyle>
+  <p:extLst>
+    <p:ext uri="{EFAFB233-063F-42B5-8137-9DF3F51BA10A}">
+      <p15:sldGuideLst xmlns:p15="http://schemas.microsoft.com/office/powerpoint/2012/main">
+        <p15:guide id="1" orient="horz" pos="1620">
+          <p15:clr>
+            <a:srgbClr val="A4A3A4"/>
+          </p15:clr>
+        </p15:guide>
+        <p15:guide id="2" pos="2880">
+          <p15:clr>
+            <a:srgbClr val="A4A3A4"/>
+          </p15:clr>
+        </p15:guide>
+      </p15:sldGuideLst>
+    </p:ext>
+  </p:extLst>
 </p:presentation>
 </file>
 
@@ -5660,7 +5676,7 @@
           <a:p>
             <a:pPr lvl="0"/>
             <a:r>
-              <a:rPr lang="en-US" dirty="0" smtClean="0"/>
+              <a:rPr lang="en-US" dirty="0"/>
               <a:t>DTDC Courier Insights:</a:t>
             </a:r>
             <a:endParaRPr/>
@@ -5694,7 +5710,7 @@
           <a:p>
             <a:pPr marL="0" lvl="0" indent="0"/>
             <a:r>
-              <a:rPr lang="en-US" dirty="0" smtClean="0"/>
+              <a:rPr lang="en-US" dirty="0"/>
               <a:t>A Comprehensive SQL-Based Logistics Analysis</a:t>
             </a:r>
             <a:endParaRPr/>
@@ -5725,7 +5741,7 @@
           <a:p>
             <a:pPr algn="ctr"/>
             <a:r>
-              <a:rPr lang="en-US" b="1" dirty="0" err="1" smtClean="0">
+              <a:rPr lang="en-US" b="1" dirty="0" err="1">
                 <a:solidFill>
                   <a:schemeClr val="dk1"/>
                 </a:solidFill>
@@ -5737,11 +5753,11 @@
               <a:t>Shubham</a:t>
             </a:r>
             <a:r>
-              <a:rPr lang="en-US" b="1" dirty="0" smtClean="0"/>
+              <a:rPr lang="en-US" b="1" dirty="0"/>
               <a:t> </a:t>
             </a:r>
             <a:r>
-              <a:rPr lang="en-US" b="1" dirty="0" err="1" smtClean="0">
+              <a:rPr lang="en-US" b="1" dirty="0" err="1">
                 <a:solidFill>
                   <a:schemeClr val="dk1"/>
                 </a:solidFill>
@@ -5752,7 +5768,7 @@
               </a:rPr>
               <a:t>Patil</a:t>
             </a:r>
-            <a:endParaRPr lang="en-US" b="1" dirty="0" smtClean="0">
+            <a:endParaRPr lang="en-US" b="1" dirty="0">
               <a:solidFill>
                 <a:schemeClr val="dk1"/>
               </a:solidFill>
@@ -5795,13 +5811,6 @@
   <p:clrMapOvr>
     <a:masterClrMapping/>
   </p:clrMapOvr>
-  <p:timing>
-    <p:tnLst>
-      <p:par>
-        <p:cTn id="1" dur="indefinite" restart="never" nodeType="tmRoot"/>
-      </p:par>
-    </p:tnLst>
-  </p:timing>
 </p:sld>
 </file>
 
@@ -5845,7 +5854,7 @@
           <a:lstStyle/>
           <a:p>
             <a:r>
-              <a:rPr lang="en-US" dirty="0" smtClean="0">
+              <a:rPr lang="en-US" dirty="0">
                 <a:latin typeface="Poppins" charset="0"/>
                 <a:cs typeface="Poppins" charset="0"/>
               </a:rPr>
@@ -5853,13 +5862,13 @@
             </a:r>
           </a:p>
           <a:p>
-            <a:endParaRPr lang="en-US" dirty="0" smtClean="0">
+            <a:endParaRPr lang="en-US" dirty="0">
               <a:latin typeface="Poppins" charset="0"/>
               <a:cs typeface="Poppins" charset="0"/>
             </a:endParaRPr>
           </a:p>
           <a:p>
-            <a:endParaRPr lang="en-US" dirty="0" smtClean="0">
+            <a:endParaRPr lang="en-US" dirty="0">
               <a:latin typeface="Poppins" charset="0"/>
               <a:cs typeface="Poppins" charset="0"/>
             </a:endParaRPr>
@@ -5952,7 +5961,7 @@
           <a:lstStyle/>
           <a:p>
             <a:r>
-              <a:rPr lang="en-US" b="1" dirty="0" smtClean="0">
+              <a:rPr lang="en-US" b="1" dirty="0">
                 <a:solidFill>
                   <a:schemeClr val="dk1"/>
                 </a:solidFill>
@@ -5964,16 +5973,12 @@
               <a:t>Output</a:t>
             </a:r>
             <a:r>
-              <a:rPr lang="en-US" sz="900" b="1" dirty="0" smtClean="0">
+              <a:rPr lang="en-US" sz="900" b="1" dirty="0">
                 <a:latin typeface="Poppins" charset="0"/>
                 <a:cs typeface="Poppins" charset="0"/>
               </a:rPr>
               <a:t>: </a:t>
             </a:r>
-            <a:endParaRPr lang="en-US" sz="900" b="1" dirty="0">
-              <a:latin typeface="Poppins" charset="0"/>
-              <a:cs typeface="Poppins" charset="0"/>
-            </a:endParaRPr>
           </a:p>
         </p:txBody>
       </p:sp>
@@ -6000,7 +6005,7 @@
           <a:lstStyle/>
           <a:p>
             <a:r>
-              <a:rPr lang="en-US" b="1" dirty="0" smtClean="0">
+              <a:rPr lang="en-US" b="1" dirty="0">
                 <a:solidFill>
                   <a:schemeClr val="dk1"/>
                 </a:solidFill>
@@ -6012,14 +6017,14 @@
               <a:t>Analysis: </a:t>
             </a:r>
             <a:r>
-              <a:rPr lang="en-US" dirty="0" smtClean="0">
+              <a:rPr lang="en-US" dirty="0">
                 <a:latin typeface="Poppins" charset="0"/>
                 <a:cs typeface="Poppins" charset="0"/>
               </a:rPr>
               <a:t>High-efficiency lanes like </a:t>
             </a:r>
             <a:r>
-              <a:rPr lang="en-US" b="1" dirty="0" err="1" smtClean="0">
+              <a:rPr lang="en-US" b="1" dirty="0" err="1">
                 <a:solidFill>
                   <a:schemeClr val="dk1"/>
                 </a:solidFill>
@@ -6031,7 +6036,7 @@
               <a:t>Dehradun</a:t>
             </a:r>
             <a:r>
-              <a:rPr lang="en-US" b="1" dirty="0" smtClean="0">
+              <a:rPr lang="en-US" b="1" dirty="0">
                 <a:solidFill>
                   <a:schemeClr val="dk1"/>
                 </a:solidFill>
@@ -6043,7 +6048,7 @@
               <a:t> - Agra, Bhopal - </a:t>
             </a:r>
             <a:r>
-              <a:rPr lang="en-US" b="1" dirty="0" err="1" smtClean="0">
+              <a:rPr lang="en-US" b="1" dirty="0" err="1">
                 <a:solidFill>
                   <a:schemeClr val="dk1"/>
                 </a:solidFill>
@@ -6055,7 +6060,7 @@
               <a:t>Jaipur</a:t>
             </a:r>
             <a:r>
-              <a:rPr lang="en-US" b="1" dirty="0" smtClean="0">
+              <a:rPr lang="en-US" b="1" dirty="0">
                 <a:solidFill>
                   <a:schemeClr val="dk1"/>
                 </a:solidFill>
@@ -6067,7 +6072,7 @@
               <a:t>, </a:t>
             </a:r>
             <a:r>
-              <a:rPr lang="en-US" b="1" dirty="0" err="1" smtClean="0">
+              <a:rPr lang="en-US" b="1" dirty="0" err="1">
                 <a:solidFill>
                   <a:schemeClr val="dk1"/>
                 </a:solidFill>
@@ -6079,7 +6084,7 @@
               <a:t>Guwahati</a:t>
             </a:r>
             <a:r>
-              <a:rPr lang="en-US" b="1" dirty="0" smtClean="0">
+              <a:rPr lang="en-US" b="1" dirty="0">
                 <a:solidFill>
                   <a:schemeClr val="dk1"/>
                 </a:solidFill>
@@ -6091,7 +6096,7 @@
               <a:t> – Raipur, Mumbai – Coimbatore and </a:t>
             </a:r>
             <a:r>
-              <a:rPr lang="en-US" b="1" dirty="0" err="1" smtClean="0">
+              <a:rPr lang="en-US" b="1" dirty="0" err="1">
                 <a:solidFill>
                   <a:schemeClr val="dk1"/>
                 </a:solidFill>
@@ -6103,7 +6108,7 @@
               <a:t>Guwahati</a:t>
             </a:r>
             <a:r>
-              <a:rPr lang="en-US" b="1" dirty="0" smtClean="0">
+              <a:rPr lang="en-US" b="1" dirty="0">
                 <a:solidFill>
                   <a:schemeClr val="dk1"/>
                 </a:solidFill>
@@ -6115,7 +6120,7 @@
               <a:t> - Varanasi </a:t>
             </a:r>
             <a:r>
-              <a:rPr lang="en-US" dirty="0" smtClean="0">
+              <a:rPr lang="en-US" dirty="0">
                 <a:latin typeface="Poppins" charset="0"/>
                 <a:cs typeface="Poppins" charset="0"/>
               </a:rPr>
@@ -6123,7 +6128,7 @@
             </a:r>
           </a:p>
           <a:p>
-            <a:endParaRPr lang="en-US" dirty="0" smtClean="0"/>
+            <a:endParaRPr lang="en-US" dirty="0"/>
           </a:p>
           <a:p>
             <a:endParaRPr lang="en-US" dirty="0"/>
@@ -6135,13 +6140,6 @@
   <p:clrMapOvr>
     <a:masterClrMapping/>
   </p:clrMapOvr>
-  <p:timing>
-    <p:tnLst>
-      <p:par>
-        <p:cTn id="1" dur="indefinite" restart="never" nodeType="tmRoot"/>
-      </p:par>
-    </p:tnLst>
-  </p:timing>
 </p:sld>
 </file>
 
@@ -6185,7 +6183,7 @@
           <a:lstStyle/>
           <a:p>
             <a:r>
-              <a:rPr lang="en-US" dirty="0" smtClean="0">
+              <a:rPr lang="en-US" dirty="0">
                 <a:latin typeface="Poppins" charset="0"/>
                 <a:cs typeface="Poppins" charset="0"/>
               </a:rPr>
@@ -6193,13 +6191,13 @@
             </a:r>
           </a:p>
           <a:p>
-            <a:endParaRPr lang="en-US" dirty="0" smtClean="0">
+            <a:endParaRPr lang="en-US" dirty="0">
               <a:latin typeface="Poppins" charset="0"/>
               <a:cs typeface="Poppins" charset="0"/>
             </a:endParaRPr>
           </a:p>
           <a:p>
-            <a:endParaRPr lang="en-US" dirty="0" smtClean="0">
+            <a:endParaRPr lang="en-US" dirty="0">
               <a:latin typeface="Poppins" charset="0"/>
               <a:cs typeface="Poppins" charset="0"/>
             </a:endParaRPr>
@@ -6232,7 +6230,7 @@
           <a:lstStyle/>
           <a:p>
             <a:r>
-              <a:rPr lang="en-US" b="1" dirty="0" smtClean="0">
+              <a:rPr lang="en-US" b="1" dirty="0">
                 <a:solidFill>
                   <a:schemeClr val="dk1"/>
                 </a:solidFill>
@@ -6244,16 +6242,12 @@
               <a:t>Output</a:t>
             </a:r>
             <a:r>
-              <a:rPr lang="en-US" sz="900" b="1" dirty="0" smtClean="0">
+              <a:rPr lang="en-US" sz="900" b="1" dirty="0">
                 <a:latin typeface="Poppins" charset="0"/>
                 <a:cs typeface="Poppins" charset="0"/>
               </a:rPr>
               <a:t>: </a:t>
             </a:r>
-            <a:endParaRPr lang="en-US" sz="900" b="1" dirty="0">
-              <a:latin typeface="Poppins" charset="0"/>
-              <a:cs typeface="Poppins" charset="0"/>
-            </a:endParaRPr>
           </a:p>
         </p:txBody>
       </p:sp>
@@ -6280,7 +6274,7 @@
           <a:lstStyle/>
           <a:p>
             <a:r>
-              <a:rPr lang="en-US" b="1" dirty="0" smtClean="0">
+              <a:rPr lang="en-US" b="1" dirty="0">
                 <a:solidFill>
                   <a:schemeClr val="dk1"/>
                 </a:solidFill>
@@ -6292,21 +6286,21 @@
               <a:t>Analysis: </a:t>
             </a:r>
             <a:r>
-              <a:rPr lang="en-US" dirty="0" smtClean="0">
+              <a:rPr lang="en-US" dirty="0">
                 <a:latin typeface="Poppins" charset="0"/>
                 <a:cs typeface="Poppins" charset="0"/>
               </a:rPr>
               <a:t>Flag routes such as</a:t>
             </a:r>
             <a:r>
-              <a:rPr lang="en-US" b="1" dirty="0" smtClean="0">
+              <a:rPr lang="en-US" b="1" dirty="0">
                 <a:latin typeface="Poppins" charset="0"/>
                 <a:cs typeface="Poppins" charset="0"/>
               </a:rPr>
               <a:t> </a:t>
             </a:r>
             <a:r>
-              <a:rPr lang="en-US" b="1" dirty="0" smtClean="0">
+              <a:rPr lang="en-US" b="1" dirty="0">
                 <a:solidFill>
                   <a:schemeClr val="dk1"/>
                 </a:solidFill>
@@ -6318,7 +6312,7 @@
               <a:t>Delhi–Agra, </a:t>
             </a:r>
             <a:r>
-              <a:rPr lang="en-US" b="1" dirty="0" err="1" smtClean="0">
+              <a:rPr lang="en-US" b="1" dirty="0" err="1">
                 <a:solidFill>
                   <a:schemeClr val="dk1"/>
                 </a:solidFill>
@@ -6330,7 +6324,7 @@
               <a:t>Thiruvananthapuram–Shimla</a:t>
             </a:r>
             <a:r>
-              <a:rPr lang="en-US" b="1" dirty="0" smtClean="0">
+              <a:rPr lang="en-US" b="1" dirty="0">
                 <a:solidFill>
                   <a:schemeClr val="dk1"/>
                 </a:solidFill>
@@ -6342,7 +6336,7 @@
               <a:t>, Meerut–Vijayawada, </a:t>
             </a:r>
             <a:r>
-              <a:rPr lang="en-US" b="1" dirty="0" err="1" smtClean="0">
+              <a:rPr lang="en-US" b="1" dirty="0" err="1">
                 <a:solidFill>
                   <a:schemeClr val="dk1"/>
                 </a:solidFill>
@@ -6354,7 +6348,7 @@
               <a:t>Guwahati–Vizag</a:t>
             </a:r>
             <a:r>
-              <a:rPr lang="en-US" b="1" dirty="0" smtClean="0">
+              <a:rPr lang="en-US" b="1" dirty="0">
                 <a:solidFill>
                   <a:schemeClr val="dk1"/>
                 </a:solidFill>
@@ -6366,7 +6360,7 @@
               <a:t>, and Amritsar–</a:t>
             </a:r>
             <a:r>
-              <a:rPr lang="en-US" b="1" dirty="0" err="1" smtClean="0">
+              <a:rPr lang="en-US" b="1" dirty="0" err="1">
                 <a:solidFill>
                   <a:schemeClr val="dk1"/>
                 </a:solidFill>
@@ -6378,7 +6372,7 @@
               <a:t>Ahmedabad</a:t>
             </a:r>
             <a:r>
-              <a:rPr lang="en-US" b="1" dirty="0" smtClean="0">
+              <a:rPr lang="en-US" b="1" dirty="0">
                 <a:solidFill>
                   <a:schemeClr val="dk1"/>
                 </a:solidFill>
@@ -6390,25 +6384,25 @@
               <a:t> </a:t>
             </a:r>
             <a:r>
-              <a:rPr lang="en-US" dirty="0" smtClean="0">
+              <a:rPr lang="en-US" dirty="0">
                 <a:latin typeface="Poppins" charset="0"/>
                 <a:cs typeface="Poppins" charset="0"/>
               </a:rPr>
               <a:t>for price revision.</a:t>
             </a:r>
-            <a:endParaRPr lang="en-US" b="1" dirty="0" smtClean="0">
+            <a:endParaRPr lang="en-US" b="1" dirty="0">
               <a:latin typeface="Poppins" charset="0"/>
               <a:cs typeface="Poppins" charset="0"/>
             </a:endParaRPr>
           </a:p>
           <a:p>
-            <a:endParaRPr lang="en-US" dirty="0" smtClean="0">
+            <a:endParaRPr lang="en-US" dirty="0">
               <a:latin typeface="Poppins" charset="0"/>
               <a:cs typeface="Poppins" charset="0"/>
             </a:endParaRPr>
           </a:p>
           <a:p>
-            <a:endParaRPr lang="en-US" dirty="0" smtClean="0"/>
+            <a:endParaRPr lang="en-US" dirty="0"/>
           </a:p>
           <a:p>
             <a:endParaRPr lang="en-US" dirty="0"/>
@@ -6480,13 +6474,6 @@
   <p:clrMapOvr>
     <a:masterClrMapping/>
   </p:clrMapOvr>
-  <p:timing>
-    <p:tnLst>
-      <p:par>
-        <p:cTn id="1" dur="indefinite" restart="never" nodeType="tmRoot"/>
-      </p:par>
-    </p:tnLst>
-  </p:timing>
 </p:sld>
 </file>
 
@@ -6530,7 +6517,7 @@
           <a:lstStyle/>
           <a:p>
             <a:r>
-              <a:rPr lang="en-US" dirty="0" smtClean="0">
+              <a:rPr lang="en-US" dirty="0">
                 <a:latin typeface="Poppins" charset="0"/>
                 <a:cs typeface="Poppins" charset="0"/>
               </a:rPr>
@@ -6538,13 +6525,13 @@
             </a:r>
           </a:p>
           <a:p>
-            <a:endParaRPr lang="en-US" dirty="0" smtClean="0">
+            <a:endParaRPr lang="en-US" dirty="0">
               <a:latin typeface="Poppins" charset="0"/>
               <a:cs typeface="Poppins" charset="0"/>
             </a:endParaRPr>
           </a:p>
           <a:p>
-            <a:endParaRPr lang="en-US" dirty="0" smtClean="0">
+            <a:endParaRPr lang="en-US" dirty="0">
               <a:latin typeface="Poppins" charset="0"/>
               <a:cs typeface="Poppins" charset="0"/>
             </a:endParaRPr>
@@ -6577,7 +6564,7 @@
           <a:lstStyle/>
           <a:p>
             <a:r>
-              <a:rPr lang="en-US" b="1" dirty="0" smtClean="0">
+              <a:rPr lang="en-US" b="1" dirty="0">
                 <a:solidFill>
                   <a:schemeClr val="dk1"/>
                 </a:solidFill>
@@ -6589,16 +6576,12 @@
               <a:t>Output</a:t>
             </a:r>
             <a:r>
-              <a:rPr lang="en-US" sz="900" b="1" dirty="0" smtClean="0">
+              <a:rPr lang="en-US" sz="900" b="1" dirty="0">
                 <a:latin typeface="Poppins" charset="0"/>
                 <a:cs typeface="Poppins" charset="0"/>
               </a:rPr>
               <a:t>: </a:t>
             </a:r>
-            <a:endParaRPr lang="en-US" sz="900" b="1" dirty="0">
-              <a:latin typeface="Poppins" charset="0"/>
-              <a:cs typeface="Poppins" charset="0"/>
-            </a:endParaRPr>
           </a:p>
         </p:txBody>
       </p:sp>
@@ -6625,7 +6608,7 @@
           <a:lstStyle/>
           <a:p>
             <a:r>
-              <a:rPr lang="en-US" b="1" dirty="0" smtClean="0">
+              <a:rPr lang="en-US" b="1" dirty="0">
                 <a:solidFill>
                   <a:schemeClr val="dk1"/>
                 </a:solidFill>
@@ -6637,14 +6620,14 @@
               <a:t>Analysis: </a:t>
             </a:r>
             <a:r>
-              <a:rPr lang="en-US" dirty="0" smtClean="0">
+              <a:rPr lang="en-US" dirty="0">
                 <a:latin typeface="Poppins" charset="0"/>
                 <a:cs typeface="Poppins" charset="0"/>
               </a:rPr>
               <a:t>Routes involving </a:t>
             </a:r>
             <a:r>
-              <a:rPr lang="en-US" b="1" dirty="0" smtClean="0">
+              <a:rPr lang="en-US" b="1" dirty="0">
                 <a:solidFill>
                   <a:schemeClr val="dk1"/>
                 </a:solidFill>
@@ -6656,39 +6639,39 @@
               <a:t>Tier 2 and 3 cities </a:t>
             </a:r>
             <a:r>
-              <a:rPr lang="en-US" dirty="0" smtClean="0">
+              <a:rPr lang="en-US" dirty="0">
                 <a:latin typeface="Poppins" charset="0"/>
                 <a:cs typeface="Poppins" charset="0"/>
               </a:rPr>
               <a:t>(e.g., Jamshedpur, Indore, Coimbatore, </a:t>
             </a:r>
             <a:r>
-              <a:rPr lang="en-US" dirty="0" err="1" smtClean="0">
+              <a:rPr lang="en-US" dirty="0" err="1">
                 <a:latin typeface="Poppins" charset="0"/>
                 <a:cs typeface="Poppins" charset="0"/>
               </a:rPr>
               <a:t>Dehradun</a:t>
             </a:r>
             <a:r>
-              <a:rPr lang="en-US" dirty="0" smtClean="0">
+              <a:rPr lang="en-US" dirty="0">
                 <a:latin typeface="Poppins" charset="0"/>
                 <a:cs typeface="Poppins" charset="0"/>
               </a:rPr>
               <a:t>) are frequently on this list. Possible reasons: Infrastructure gaps requiring extra services.</a:t>
             </a:r>
-            <a:endParaRPr lang="en-US" b="1" dirty="0" smtClean="0">
+            <a:endParaRPr lang="en-US" b="1" dirty="0">
               <a:latin typeface="Poppins" charset="0"/>
               <a:cs typeface="Poppins" charset="0"/>
             </a:endParaRPr>
           </a:p>
           <a:p>
-            <a:endParaRPr lang="en-US" dirty="0" smtClean="0">
+            <a:endParaRPr lang="en-US" dirty="0">
               <a:latin typeface="Poppins" charset="0"/>
               <a:cs typeface="Poppins" charset="0"/>
             </a:endParaRPr>
           </a:p>
           <a:p>
-            <a:endParaRPr lang="en-US" dirty="0" smtClean="0"/>
+            <a:endParaRPr lang="en-US" dirty="0"/>
           </a:p>
           <a:p>
             <a:endParaRPr lang="en-US" dirty="0"/>
@@ -6760,13 +6743,6 @@
   <p:clrMapOvr>
     <a:masterClrMapping/>
   </p:clrMapOvr>
-  <p:timing>
-    <p:tnLst>
-      <p:par>
-        <p:cTn id="1" dur="indefinite" restart="never" nodeType="tmRoot"/>
-      </p:par>
-    </p:tnLst>
-  </p:timing>
 </p:sld>
 </file>
 
@@ -6810,7 +6786,7 @@
           <a:lstStyle/>
           <a:p>
             <a:r>
-              <a:rPr lang="en-US" dirty="0" smtClean="0">
+              <a:rPr lang="en-US" dirty="0">
                 <a:latin typeface="Poppins" charset="0"/>
                 <a:cs typeface="Poppins" charset="0"/>
               </a:rPr>
@@ -6818,19 +6794,19 @@
             </a:r>
           </a:p>
           <a:p>
-            <a:endParaRPr lang="en-US" dirty="0" smtClean="0">
+            <a:endParaRPr lang="en-US" dirty="0">
               <a:latin typeface="Poppins" charset="0"/>
               <a:cs typeface="Poppins" charset="0"/>
             </a:endParaRPr>
           </a:p>
           <a:p>
-            <a:endParaRPr lang="en-US" dirty="0" smtClean="0">
+            <a:endParaRPr lang="en-US" dirty="0">
               <a:latin typeface="Poppins" charset="0"/>
               <a:cs typeface="Poppins" charset="0"/>
             </a:endParaRPr>
           </a:p>
           <a:p>
-            <a:endParaRPr lang="en-US" dirty="0" smtClean="0">
+            <a:endParaRPr lang="en-US" dirty="0">
               <a:latin typeface="Poppins" charset="0"/>
               <a:cs typeface="Poppins" charset="0"/>
             </a:endParaRPr>
@@ -6863,7 +6839,7 @@
           <a:lstStyle/>
           <a:p>
             <a:r>
-              <a:rPr lang="en-US" b="1" dirty="0" smtClean="0">
+              <a:rPr lang="en-US" b="1" dirty="0">
                 <a:solidFill>
                   <a:schemeClr val="dk1"/>
                 </a:solidFill>
@@ -6875,16 +6851,12 @@
               <a:t>Output</a:t>
             </a:r>
             <a:r>
-              <a:rPr lang="en-US" sz="900" b="1" dirty="0" smtClean="0">
+              <a:rPr lang="en-US" sz="900" b="1" dirty="0">
                 <a:latin typeface="Poppins" charset="0"/>
                 <a:cs typeface="Poppins" charset="0"/>
               </a:rPr>
               <a:t>: </a:t>
             </a:r>
-            <a:endParaRPr lang="en-US" sz="900" b="1" dirty="0">
-              <a:latin typeface="Poppins" charset="0"/>
-              <a:cs typeface="Poppins" charset="0"/>
-            </a:endParaRPr>
           </a:p>
         </p:txBody>
       </p:sp>
@@ -6911,7 +6883,7 @@
           <a:lstStyle/>
           <a:p>
             <a:r>
-              <a:rPr lang="en-US" b="1" dirty="0" smtClean="0">
+              <a:rPr lang="en-US" b="1" dirty="0">
                 <a:solidFill>
                   <a:schemeClr val="dk1"/>
                 </a:solidFill>
@@ -6923,7 +6895,7 @@
               <a:t>Analysis: </a:t>
             </a:r>
             <a:r>
-              <a:rPr lang="en-US" b="1" dirty="0" smtClean="0">
+              <a:rPr lang="en-US" b="1" dirty="0">
                 <a:solidFill>
                   <a:schemeClr val="dk1"/>
                 </a:solidFill>
@@ -6935,29 +6907,29 @@
               <a:t>13.23% </a:t>
             </a:r>
             <a:r>
-              <a:rPr lang="en-US" dirty="0" smtClean="0">
+              <a:rPr lang="en-US" dirty="0">
                 <a:latin typeface="Poppins" charset="0"/>
                 <a:cs typeface="Poppins" charset="0"/>
               </a:rPr>
               <a:t>of the total revenue is allocated to VAS charges, representing premium add-ons or upgrades to the core logistics services offered</a:t>
             </a:r>
             <a:r>
-              <a:rPr lang="en-US" dirty="0" smtClean="0"/>
+              <a:rPr lang="en-US" dirty="0"/>
               <a:t>.</a:t>
             </a:r>
-            <a:endParaRPr lang="en-US" b="1" dirty="0" smtClean="0">
+            <a:endParaRPr lang="en-US" b="1" dirty="0">
               <a:latin typeface="Poppins" charset="0"/>
               <a:cs typeface="Poppins" charset="0"/>
             </a:endParaRPr>
           </a:p>
           <a:p>
-            <a:endParaRPr lang="en-US" dirty="0" smtClean="0">
+            <a:endParaRPr lang="en-US" dirty="0">
               <a:latin typeface="Poppins" charset="0"/>
               <a:cs typeface="Poppins" charset="0"/>
             </a:endParaRPr>
           </a:p>
           <a:p>
-            <a:endParaRPr lang="en-US" dirty="0" smtClean="0"/>
+            <a:endParaRPr lang="en-US" dirty="0"/>
           </a:p>
           <a:p>
             <a:endParaRPr lang="en-US" dirty="0"/>
@@ -7029,13 +7001,6 @@
   <p:clrMapOvr>
     <a:masterClrMapping/>
   </p:clrMapOvr>
-  <p:timing>
-    <p:tnLst>
-      <p:par>
-        <p:cTn id="1" dur="indefinite" restart="never" nodeType="tmRoot"/>
-      </p:par>
-    </p:tnLst>
-  </p:timing>
 </p:sld>
 </file>
 
@@ -7079,7 +7044,7 @@
           <a:lstStyle/>
           <a:p>
             <a:r>
-              <a:rPr lang="en-US" dirty="0" smtClean="0">
+              <a:rPr lang="en-US" dirty="0">
                 <a:latin typeface="Poppins" charset="0"/>
                 <a:cs typeface="Poppins" charset="0"/>
               </a:rPr>
@@ -7088,7 +7053,7 @@
           </a:p>
           <a:p>
             <a:r>
-              <a:rPr lang="en-US" dirty="0" smtClean="0">
+              <a:rPr lang="en-US" dirty="0">
                 <a:latin typeface="Poppins" charset="0"/>
                 <a:cs typeface="Poppins" charset="0"/>
               </a:rPr>
@@ -7096,19 +7061,19 @@
             </a:r>
           </a:p>
           <a:p>
-            <a:endParaRPr lang="en-US" dirty="0" smtClean="0">
+            <a:endParaRPr lang="en-US" dirty="0">
               <a:latin typeface="Poppins" charset="0"/>
               <a:cs typeface="Poppins" charset="0"/>
             </a:endParaRPr>
           </a:p>
           <a:p>
-            <a:endParaRPr lang="en-US" dirty="0" smtClean="0">
+            <a:endParaRPr lang="en-US" dirty="0">
               <a:latin typeface="Poppins" charset="0"/>
               <a:cs typeface="Poppins" charset="0"/>
             </a:endParaRPr>
           </a:p>
           <a:p>
-            <a:endParaRPr lang="en-US" dirty="0" smtClean="0">
+            <a:endParaRPr lang="en-US" dirty="0">
               <a:latin typeface="Poppins" charset="0"/>
               <a:cs typeface="Poppins" charset="0"/>
             </a:endParaRPr>
@@ -7141,7 +7106,7 @@
           <a:lstStyle/>
           <a:p>
             <a:r>
-              <a:rPr lang="en-US" b="1" dirty="0" smtClean="0">
+              <a:rPr lang="en-US" b="1" dirty="0">
                 <a:solidFill>
                   <a:schemeClr val="dk1"/>
                 </a:solidFill>
@@ -7153,16 +7118,12 @@
               <a:t>Output</a:t>
             </a:r>
             <a:r>
-              <a:rPr lang="en-US" sz="900" b="1" dirty="0" smtClean="0">
+              <a:rPr lang="en-US" sz="900" b="1" dirty="0">
                 <a:latin typeface="Poppins" charset="0"/>
                 <a:cs typeface="Poppins" charset="0"/>
               </a:rPr>
               <a:t>: </a:t>
             </a:r>
-            <a:endParaRPr lang="en-US" sz="900" b="1" dirty="0">
-              <a:latin typeface="Poppins" charset="0"/>
-              <a:cs typeface="Poppins" charset="0"/>
-            </a:endParaRPr>
           </a:p>
         </p:txBody>
       </p:sp>
@@ -7189,7 +7150,7 @@
           <a:lstStyle/>
           <a:p>
             <a:r>
-              <a:rPr lang="en-US" b="1" dirty="0" smtClean="0">
+              <a:rPr lang="en-US" b="1" dirty="0">
                 <a:solidFill>
                   <a:schemeClr val="dk1"/>
                 </a:solidFill>
@@ -7201,29 +7162,29 @@
               <a:t>Analysis:</a:t>
             </a:r>
             <a:r>
-              <a:rPr lang="en-US" dirty="0" smtClean="0"/>
+              <a:rPr lang="en-US" dirty="0"/>
               <a:t> </a:t>
             </a:r>
             <a:r>
-              <a:rPr lang="en-US" dirty="0" smtClean="0">
+              <a:rPr lang="en-US" dirty="0">
                 <a:latin typeface="Poppins" charset="0"/>
                 <a:cs typeface="Poppins" charset="0"/>
               </a:rPr>
               <a:t>Major contribution to revenue is done by surface mode of transport with highest observed volume of shipments. Vas charge margin from revenue is highest in Surface. Profitability index is highest in express mode of transport 727 per consignment.</a:t>
             </a:r>
-            <a:endParaRPr lang="en-US" b="1" dirty="0" smtClean="0">
+            <a:endParaRPr lang="en-US" b="1" dirty="0">
               <a:latin typeface="Poppins" charset="0"/>
               <a:cs typeface="Poppins" charset="0"/>
             </a:endParaRPr>
           </a:p>
           <a:p>
-            <a:endParaRPr lang="en-US" dirty="0" smtClean="0">
+            <a:endParaRPr lang="en-US" dirty="0">
               <a:latin typeface="Poppins" charset="0"/>
               <a:cs typeface="Poppins" charset="0"/>
             </a:endParaRPr>
           </a:p>
           <a:p>
-            <a:endParaRPr lang="en-US" dirty="0" smtClean="0"/>
+            <a:endParaRPr lang="en-US" dirty="0"/>
           </a:p>
           <a:p>
             <a:endParaRPr lang="en-US" dirty="0"/>
@@ -7295,13 +7256,6 @@
   <p:clrMapOvr>
     <a:masterClrMapping/>
   </p:clrMapOvr>
-  <p:timing>
-    <p:tnLst>
-      <p:par>
-        <p:cTn id="1" dur="indefinite" restart="never" nodeType="tmRoot"/>
-      </p:par>
-    </p:tnLst>
-  </p:timing>
 </p:sld>
 </file>
 
@@ -7345,7 +7299,7 @@
           <a:lstStyle/>
           <a:p>
             <a:r>
-              <a:rPr lang="en-US" dirty="0" smtClean="0">
+              <a:rPr lang="en-US" dirty="0">
                 <a:latin typeface="Poppins" charset="0"/>
                 <a:cs typeface="Poppins" charset="0"/>
               </a:rPr>
@@ -7354,7 +7308,7 @@
           </a:p>
           <a:p>
             <a:r>
-              <a:rPr lang="en-US" dirty="0" smtClean="0">
+              <a:rPr lang="en-US" dirty="0">
                 <a:latin typeface="Poppins" charset="0"/>
                 <a:cs typeface="Poppins" charset="0"/>
               </a:rPr>
@@ -7363,7 +7317,7 @@
           </a:p>
           <a:p>
             <a:r>
-              <a:rPr lang="en-US" dirty="0" smtClean="0">
+              <a:rPr lang="en-US" dirty="0">
                 <a:latin typeface="Poppins" charset="0"/>
                 <a:cs typeface="Poppins" charset="0"/>
               </a:rPr>
@@ -7371,19 +7325,19 @@
             </a:r>
           </a:p>
           <a:p>
-            <a:endParaRPr lang="en-US" dirty="0" smtClean="0">
+            <a:endParaRPr lang="en-US" dirty="0">
               <a:latin typeface="Poppins" charset="0"/>
               <a:cs typeface="Poppins" charset="0"/>
             </a:endParaRPr>
           </a:p>
           <a:p>
-            <a:endParaRPr lang="en-US" dirty="0" smtClean="0">
+            <a:endParaRPr lang="en-US" dirty="0">
               <a:latin typeface="Poppins" charset="0"/>
               <a:cs typeface="Poppins" charset="0"/>
             </a:endParaRPr>
           </a:p>
           <a:p>
-            <a:endParaRPr lang="en-US" dirty="0" smtClean="0">
+            <a:endParaRPr lang="en-US" dirty="0">
               <a:latin typeface="Poppins" charset="0"/>
               <a:cs typeface="Poppins" charset="0"/>
             </a:endParaRPr>
@@ -7416,7 +7370,7 @@
           <a:lstStyle/>
           <a:p>
             <a:r>
-              <a:rPr lang="en-US" b="1" dirty="0" smtClean="0">
+              <a:rPr lang="en-US" b="1" dirty="0">
                 <a:solidFill>
                   <a:schemeClr val="dk1"/>
                 </a:solidFill>
@@ -7428,33 +7382,33 @@
               <a:t>Analysis:</a:t>
             </a:r>
             <a:r>
-              <a:rPr lang="en-US" dirty="0" smtClean="0"/>
+              <a:rPr lang="en-US" dirty="0"/>
               <a:t> </a:t>
             </a:r>
             <a:r>
-              <a:rPr lang="en-US" dirty="0" smtClean="0">
+              <a:rPr lang="en-US" dirty="0">
                 <a:latin typeface="Poppins" charset="0"/>
                 <a:cs typeface="Poppins" charset="0"/>
               </a:rPr>
               <a:t>Major volumes of high revenue orders are received from Maharashtra and Uttar Pradesh. Profitability index is consistent through all top 5 states in range 500-510 per consignmen</a:t>
             </a:r>
             <a:r>
-              <a:rPr lang="en-US" dirty="0" smtClean="0"/>
+              <a:rPr lang="en-US" dirty="0"/>
               <a:t>t.</a:t>
             </a:r>
-            <a:endParaRPr lang="en-US" b="1" dirty="0" smtClean="0">
+            <a:endParaRPr lang="en-US" b="1" dirty="0">
               <a:latin typeface="Poppins" charset="0"/>
               <a:cs typeface="Poppins" charset="0"/>
             </a:endParaRPr>
           </a:p>
           <a:p>
-            <a:endParaRPr lang="en-US" dirty="0" smtClean="0">
+            <a:endParaRPr lang="en-US" dirty="0">
               <a:latin typeface="Poppins" charset="0"/>
               <a:cs typeface="Poppins" charset="0"/>
             </a:endParaRPr>
           </a:p>
           <a:p>
-            <a:endParaRPr lang="en-US" dirty="0" smtClean="0"/>
+            <a:endParaRPr lang="en-US" dirty="0"/>
           </a:p>
           <a:p>
             <a:endParaRPr lang="en-US" dirty="0"/>
@@ -7544,7 +7498,7 @@
           <a:lstStyle/>
           <a:p>
             <a:r>
-              <a:rPr lang="en-US" b="1" dirty="0" smtClean="0">
+              <a:rPr lang="en-US" b="1" dirty="0">
                 <a:solidFill>
                   <a:schemeClr val="dk1"/>
                 </a:solidFill>
@@ -7556,16 +7510,12 @@
               <a:t>Output</a:t>
             </a:r>
             <a:r>
-              <a:rPr lang="en-US" sz="900" b="1" dirty="0" smtClean="0">
+              <a:rPr lang="en-US" sz="900" b="1" dirty="0">
                 <a:latin typeface="Poppins" charset="0"/>
                 <a:cs typeface="Poppins" charset="0"/>
               </a:rPr>
               <a:t>: </a:t>
             </a:r>
-            <a:endParaRPr lang="en-US" sz="900" b="1" dirty="0">
-              <a:latin typeface="Poppins" charset="0"/>
-              <a:cs typeface="Poppins" charset="0"/>
-            </a:endParaRPr>
           </a:p>
         </p:txBody>
       </p:sp>
@@ -7574,13 +7524,6 @@
   <p:clrMapOvr>
     <a:masterClrMapping/>
   </p:clrMapOvr>
-  <p:timing>
-    <p:tnLst>
-      <p:par>
-        <p:cTn id="1" dur="indefinite" restart="never" nodeType="tmRoot"/>
-      </p:par>
-    </p:tnLst>
-  </p:timing>
 </p:sld>
 </file>
 
@@ -7624,35 +7567,35 @@
           <a:lstStyle/>
           <a:p>
             <a:r>
-              <a:rPr lang="en-US" dirty="0" smtClean="0">
+              <a:rPr lang="en-US" dirty="0">
                 <a:latin typeface="Poppins" charset="0"/>
                 <a:cs typeface="Poppins" charset="0"/>
               </a:rPr>
               <a:t>9.      Count Consignments where </a:t>
             </a:r>
             <a:r>
-              <a:rPr lang="en-US" dirty="0" err="1" smtClean="0">
+              <a:rPr lang="en-US" dirty="0" err="1">
                 <a:latin typeface="Poppins" charset="0"/>
                 <a:cs typeface="Poppins" charset="0"/>
               </a:rPr>
               <a:t>chargeable_wt</a:t>
             </a:r>
             <a:r>
-              <a:rPr lang="en-US" dirty="0" smtClean="0">
+              <a:rPr lang="en-US" dirty="0">
                 <a:latin typeface="Poppins" charset="0"/>
                 <a:cs typeface="Poppins" charset="0"/>
               </a:rPr>
               <a:t> deviates significantly &gt; 2kg from </a:t>
             </a:r>
             <a:r>
-              <a:rPr lang="en-US" dirty="0" err="1" smtClean="0">
+              <a:rPr lang="en-US" dirty="0" err="1">
                 <a:latin typeface="Poppins" charset="0"/>
                 <a:cs typeface="Poppins" charset="0"/>
               </a:rPr>
               <a:t>actual_wt</a:t>
             </a:r>
             <a:r>
-              <a:rPr lang="en-US" dirty="0" smtClean="0">
+              <a:rPr lang="en-US" dirty="0">
                 <a:latin typeface="Poppins" charset="0"/>
                 <a:cs typeface="Poppins" charset="0"/>
               </a:rPr>
@@ -7660,14 +7603,14 @@
             </a:r>
           </a:p>
           <a:p>
-            <a:endParaRPr lang="en-US" dirty="0" smtClean="0">
+            <a:endParaRPr lang="en-US" dirty="0">
               <a:latin typeface="Poppins" charset="0"/>
               <a:cs typeface="Poppins" charset="0"/>
             </a:endParaRPr>
           </a:p>
           <a:p>
             <a:r>
-              <a:rPr lang="en-US" dirty="0" smtClean="0">
+              <a:rPr lang="en-US" dirty="0">
                 <a:latin typeface="Poppins" charset="0"/>
                 <a:cs typeface="Poppins" charset="0"/>
               </a:rPr>
@@ -7676,7 +7619,7 @@
           </a:p>
           <a:p>
             <a:r>
-              <a:rPr lang="en-US" dirty="0" smtClean="0">
+              <a:rPr lang="en-US" dirty="0">
                 <a:latin typeface="Poppins" charset="0"/>
                 <a:cs typeface="Poppins" charset="0"/>
               </a:rPr>
@@ -7684,19 +7627,19 @@
             </a:r>
           </a:p>
           <a:p>
-            <a:endParaRPr lang="en-US" dirty="0" smtClean="0">
+            <a:endParaRPr lang="en-US" dirty="0">
               <a:latin typeface="Poppins" charset="0"/>
               <a:cs typeface="Poppins" charset="0"/>
             </a:endParaRPr>
           </a:p>
           <a:p>
-            <a:endParaRPr lang="en-US" dirty="0" smtClean="0">
+            <a:endParaRPr lang="en-US" dirty="0">
               <a:latin typeface="Poppins" charset="0"/>
               <a:cs typeface="Poppins" charset="0"/>
             </a:endParaRPr>
           </a:p>
           <a:p>
-            <a:endParaRPr lang="en-US" dirty="0" smtClean="0">
+            <a:endParaRPr lang="en-US" dirty="0">
               <a:latin typeface="Poppins" charset="0"/>
               <a:cs typeface="Poppins" charset="0"/>
             </a:endParaRPr>
@@ -7715,7 +7658,7 @@
         <p:spPr>
           <a:xfrm>
             <a:off x="4286248" y="3643320"/>
-            <a:ext cx="4714908" cy="1384995"/>
+            <a:ext cx="4714908" cy="1600438"/>
           </a:xfrm>
           <a:prstGeom prst="rect">
             <a:avLst/>
@@ -7729,7 +7672,7 @@
           <a:lstStyle/>
           <a:p>
             <a:r>
-              <a:rPr lang="en-US" b="1" dirty="0" smtClean="0">
+              <a:rPr lang="en-US" b="1" dirty="0">
                 <a:solidFill>
                   <a:schemeClr val="dk1"/>
                 </a:solidFill>
@@ -7741,46 +7684,25 @@
               <a:t>Analysis:</a:t>
             </a:r>
             <a:r>
-              <a:rPr lang="en-US" dirty="0" smtClean="0"/>
-              <a:t> 34.28%</a:t>
-            </a:r>
-            <a:r>
-              <a:rPr lang="en-US" b="1" dirty="0" smtClean="0"/>
+              <a:rPr lang="en-US" dirty="0"/>
               <a:t> </a:t>
             </a:r>
             <a:r>
-              <a:rPr lang="en-US" dirty="0" smtClean="0"/>
-              <a:t>of consignments have a significant weight deviation.</a:t>
-            </a:r>
-            <a:r>
-              <a:rPr lang="en-US" b="1" dirty="0" smtClean="0"/>
-              <a:t> </a:t>
-            </a:r>
-            <a:r>
-              <a:rPr lang="en-US" dirty="0" smtClean="0"/>
-              <a:t>Data inconsistencies</a:t>
-            </a:r>
-            <a:r>
-              <a:rPr lang="en-US" b="1" dirty="0" smtClean="0"/>
-              <a:t> </a:t>
-            </a:r>
-            <a:r>
-              <a:rPr lang="en-US" dirty="0" smtClean="0"/>
-              <a:t>observed in data in form of incorrect weight capture during booking. </a:t>
-            </a:r>
-            <a:endParaRPr lang="en-US" b="1" dirty="0" smtClean="0">
+              <a:rPr lang="en-US" dirty="0">
+                <a:latin typeface="Poppins" charset="0"/>
+                <a:cs typeface="Poppins" charset="0"/>
+              </a:rPr>
+              <a:t>34.28% of consignments have a significant weight deviation. Data inconsistencies observed in data in form of incorrect weight capture during booking. </a:t>
+            </a:r>
+          </a:p>
+          <a:p>
+            <a:endParaRPr lang="en-US" dirty="0">
               <a:latin typeface="Poppins" charset="0"/>
               <a:cs typeface="Poppins" charset="0"/>
             </a:endParaRPr>
           </a:p>
           <a:p>
-            <a:endParaRPr lang="en-US" dirty="0" smtClean="0">
-              <a:latin typeface="Poppins" charset="0"/>
-              <a:cs typeface="Poppins" charset="0"/>
-            </a:endParaRPr>
-          </a:p>
-          <a:p>
-            <a:endParaRPr lang="en-US" dirty="0" smtClean="0"/>
+            <a:endParaRPr lang="en-US" dirty="0"/>
           </a:p>
           <a:p>
             <a:endParaRPr lang="en-US" dirty="0"/>
@@ -7810,7 +7732,7 @@
           <a:lstStyle/>
           <a:p>
             <a:r>
-              <a:rPr lang="en-US" b="1" dirty="0" smtClean="0">
+              <a:rPr lang="en-US" b="1" dirty="0">
                 <a:solidFill>
                   <a:schemeClr val="dk1"/>
                 </a:solidFill>
@@ -7822,16 +7744,12 @@
               <a:t>Output</a:t>
             </a:r>
             <a:r>
-              <a:rPr lang="en-US" sz="900" b="1" dirty="0" smtClean="0">
+              <a:rPr lang="en-US" sz="900" b="1" dirty="0">
                 <a:latin typeface="Poppins" charset="0"/>
                 <a:cs typeface="Poppins" charset="0"/>
               </a:rPr>
               <a:t>: </a:t>
             </a:r>
-            <a:endParaRPr lang="en-US" sz="900" b="1" dirty="0">
-              <a:latin typeface="Poppins" charset="0"/>
-              <a:cs typeface="Poppins" charset="0"/>
-            </a:endParaRPr>
           </a:p>
         </p:txBody>
       </p:sp>
@@ -7900,13 +7818,6 @@
   <p:clrMapOvr>
     <a:masterClrMapping/>
   </p:clrMapOvr>
-  <p:timing>
-    <p:tnLst>
-      <p:par>
-        <p:cTn id="1" dur="indefinite" restart="never" nodeType="tmRoot"/>
-      </p:par>
-    </p:tnLst>
-  </p:timing>
 </p:sld>
 </file>
 
@@ -7944,10 +7855,9 @@
           <a:p>
             <a:pPr algn="l"/>
             <a:r>
-              <a:rPr lang="en-US" dirty="0" smtClean="0"/>
+              <a:rPr lang="en-US" dirty="0"/>
               <a:t>Key Insights and Findings:</a:t>
             </a:r>
-            <a:endParaRPr lang="en-US" dirty="0"/>
           </a:p>
         </p:txBody>
       </p:sp>
@@ -7974,7 +7884,7 @@
           <a:lstStyle/>
           <a:p>
             <a:r>
-              <a:rPr lang="en-US" b="1" dirty="0" smtClean="0">
+              <a:rPr lang="en-US" b="1" dirty="0">
                 <a:solidFill>
                   <a:schemeClr val="dk1"/>
                 </a:solidFill>
@@ -7992,7 +7902,7 @@
               <a:buChar char="v"/>
             </a:pPr>
             <a:r>
-              <a:rPr lang="en-US" dirty="0" smtClean="0">
+              <a:rPr lang="en-US" dirty="0">
                 <a:latin typeface="Poppins" charset="0"/>
                 <a:cs typeface="Poppins" charset="0"/>
               </a:rPr>
@@ -8005,7 +7915,7 @@
               <a:buChar char="v"/>
             </a:pPr>
             <a:r>
-              <a:rPr lang="en-US" dirty="0" smtClean="0">
+              <a:rPr lang="en-US" dirty="0">
                 <a:latin typeface="Poppins" charset="0"/>
                 <a:cs typeface="Poppins" charset="0"/>
               </a:rPr>
@@ -8018,14 +7928,14 @@
               <a:buChar char="v"/>
             </a:pPr>
             <a:r>
-              <a:rPr lang="en-US" dirty="0" smtClean="0">
+              <a:rPr lang="en-US" dirty="0">
                 <a:latin typeface="Poppins" charset="0"/>
                 <a:cs typeface="Poppins" charset="0"/>
               </a:rPr>
               <a:t>High-delay booking codes (e.g., </a:t>
             </a:r>
             <a:r>
-              <a:rPr lang="en-US" dirty="0" smtClean="0">
+              <a:rPr lang="en-US" dirty="0">
                 <a:solidFill>
                   <a:schemeClr val="dk1"/>
                 </a:solidFill>
@@ -8037,7 +7947,7 @@
               <a:t>BR926</a:t>
             </a:r>
             <a:r>
-              <a:rPr lang="en-US" dirty="0" smtClean="0">
+              <a:rPr lang="en-US" dirty="0">
                 <a:latin typeface="Poppins" charset="0"/>
                 <a:cs typeface="Poppins" charset="0"/>
               </a:rPr>
@@ -8050,7 +7960,7 @@
                 <a:spcPct val="150000"/>
               </a:lnSpc>
             </a:pPr>
-            <a:endParaRPr lang="en-US" b="1" dirty="0" smtClean="0">
+            <a:endParaRPr lang="en-US" b="1" dirty="0">
               <a:solidFill>
                 <a:schemeClr val="dk1"/>
               </a:solidFill>
@@ -8062,7 +7972,7 @@
           </a:p>
           <a:p>
             <a:r>
-              <a:rPr lang="en-US" b="1" dirty="0" smtClean="0">
+              <a:rPr lang="en-US" b="1" dirty="0">
                 <a:solidFill>
                   <a:schemeClr val="dk1"/>
                 </a:solidFill>
@@ -8080,7 +7990,15 @@
               <a:buChar char="v"/>
             </a:pPr>
             <a:r>
-              <a:rPr lang="en-US" dirty="0" smtClean="0">
+              <a:rPr lang="en-US" dirty="0">
+                <a:latin typeface="Poppins" charset="0"/>
+                <a:cs typeface="Poppins" charset="0"/>
+                <a:sym typeface="Poppins"/>
+              </a:rPr>
+              <a:t>Express</a:t>
+            </a:r>
+            <a:r>
+              <a:rPr lang="en-US" dirty="0">
                 <a:solidFill>
                   <a:schemeClr val="dk1"/>
                 </a:solidFill>
@@ -8089,10 +8007,10 @@
                 <a:cs typeface="Poppins"/>
                 <a:sym typeface="Poppins"/>
               </a:rPr>
-              <a:t>Express </a:t>
-            </a:r>
-            <a:r>
-              <a:rPr lang="en-US" dirty="0" smtClean="0">
+              <a:t> </a:t>
+            </a:r>
+            <a:r>
+              <a:rPr lang="en-US" dirty="0">
                 <a:latin typeface="Poppins" charset="0"/>
                 <a:cs typeface="Poppins" charset="0"/>
               </a:rPr>
@@ -8105,21 +8023,21 @@
               <a:buChar char="v"/>
             </a:pPr>
             <a:r>
-              <a:rPr lang="en-US" dirty="0" smtClean="0">
+              <a:rPr lang="en-US" dirty="0">
                 <a:latin typeface="Poppins" charset="0"/>
                 <a:cs typeface="Poppins" charset="0"/>
               </a:rPr>
               <a:t>Efficient routes: </a:t>
             </a:r>
             <a:r>
-              <a:rPr lang="en-US" dirty="0" err="1" smtClean="0">
+              <a:rPr lang="en-US" dirty="0" err="1">
                 <a:latin typeface="Poppins" charset="0"/>
                 <a:cs typeface="Poppins" charset="0"/>
               </a:rPr>
               <a:t>Dehradun</a:t>
             </a:r>
             <a:r>
-              <a:rPr lang="en-US" dirty="0" smtClean="0">
+              <a:rPr lang="en-US" dirty="0">
                 <a:latin typeface="Poppins" charset="0"/>
                 <a:cs typeface="Poppins" charset="0"/>
               </a:rPr>
@@ -8132,7 +8050,7 @@
               <a:buChar char="v"/>
             </a:pPr>
             <a:r>
-              <a:rPr lang="en-US" dirty="0" smtClean="0">
+              <a:rPr lang="en-US" dirty="0">
                 <a:latin typeface="Poppins" charset="0"/>
                 <a:cs typeface="Poppins" charset="0"/>
               </a:rPr>
@@ -8145,7 +8063,7 @@
               <a:buChar char="v"/>
             </a:pPr>
             <a:r>
-              <a:rPr lang="en-US" dirty="0" smtClean="0">
+              <a:rPr lang="en-US" dirty="0">
                 <a:latin typeface="Poppins" charset="0"/>
                 <a:cs typeface="Poppins" charset="0"/>
               </a:rPr>
@@ -8153,7 +8071,7 @@
             </a:r>
           </a:p>
           <a:p>
-            <a:endParaRPr lang="en-US" b="1" dirty="0" smtClean="0">
+            <a:endParaRPr lang="en-US" b="1" dirty="0">
               <a:latin typeface="Poppins" charset="0"/>
               <a:cs typeface="Poppins" charset="0"/>
             </a:endParaRPr>
@@ -8165,13 +8083,6 @@
   <p:clrMapOvr>
     <a:masterClrMapping/>
   </p:clrMapOvr>
-  <p:timing>
-    <p:tnLst>
-      <p:par>
-        <p:cTn id="1" dur="indefinite" restart="never" nodeType="tmRoot"/>
-      </p:par>
-    </p:tnLst>
-  </p:timing>
 </p:sld>
 </file>
 
@@ -8215,7 +8126,7 @@
           <a:lstStyle/>
           <a:p>
             <a:r>
-              <a:rPr lang="en-US" b="1" dirty="0" smtClean="0">
+              <a:rPr lang="en-US" b="1" dirty="0">
                 <a:solidFill>
                   <a:schemeClr val="dk1"/>
                 </a:solidFill>
@@ -8233,9 +8144,11 @@
               <a:buChar char="v"/>
             </a:pPr>
             <a:r>
-              <a:rPr lang="en-US" dirty="0" smtClean="0">
+              <a:rPr lang="en-US" dirty="0">
                 <a:solidFill>
-                  <a:schemeClr val="dk1"/>
+                  <a:schemeClr val="accent3">
+                    <a:lumMod val="10000"/>
+                  </a:schemeClr>
                 </a:solidFill>
                 <a:latin typeface="Poppins"/>
                 <a:ea typeface="Poppins"/>
@@ -8251,9 +8164,11 @@
               <a:buChar char="v"/>
             </a:pPr>
             <a:r>
-              <a:rPr lang="en-US" dirty="0" smtClean="0">
+              <a:rPr lang="en-US" dirty="0">
                 <a:solidFill>
-                  <a:schemeClr val="dk1"/>
+                  <a:schemeClr val="accent3">
+                    <a:lumMod val="10000"/>
+                  </a:schemeClr>
                 </a:solidFill>
                 <a:latin typeface="Poppins"/>
                 <a:ea typeface="Poppins"/>
@@ -8268,7 +8183,7 @@
               <a:buFont typeface="Arial" pitchFamily="34" charset="0"/>
               <a:buChar char="•"/>
             </a:pPr>
-            <a:endParaRPr lang="en-US" dirty="0" smtClean="0">
+            <a:endParaRPr lang="en-US" dirty="0">
               <a:solidFill>
                 <a:schemeClr val="dk1"/>
               </a:solidFill>
@@ -8280,7 +8195,7 @@
           </a:p>
           <a:p>
             <a:r>
-              <a:rPr lang="en-US" b="1" dirty="0" smtClean="0">
+              <a:rPr lang="en-US" b="1" dirty="0">
                 <a:solidFill>
                   <a:schemeClr val="dk1"/>
                 </a:solidFill>
@@ -8298,9 +8213,11 @@
               <a:buChar char="v"/>
             </a:pPr>
             <a:r>
-              <a:rPr lang="en-US" dirty="0" smtClean="0">
+              <a:rPr lang="en-US" dirty="0">
                 <a:solidFill>
-                  <a:schemeClr val="dk1"/>
+                  <a:schemeClr val="accent3">
+                    <a:lumMod val="10000"/>
+                  </a:schemeClr>
                 </a:solidFill>
                 <a:latin typeface="Poppins"/>
                 <a:ea typeface="Poppins"/>
@@ -8316,9 +8233,11 @@
               <a:buChar char="v"/>
             </a:pPr>
             <a:r>
-              <a:rPr lang="en-US" dirty="0" smtClean="0">
+              <a:rPr lang="en-US" dirty="0">
                 <a:solidFill>
-                  <a:schemeClr val="dk1"/>
+                  <a:schemeClr val="accent3">
+                    <a:lumMod val="10000"/>
+                  </a:schemeClr>
                 </a:solidFill>
                 <a:latin typeface="Poppins"/>
                 <a:ea typeface="Poppins"/>
@@ -8334,9 +8253,11 @@
               <a:buChar char="v"/>
             </a:pPr>
             <a:r>
-              <a:rPr lang="en-US" dirty="0" smtClean="0">
+              <a:rPr lang="en-US" dirty="0">
                 <a:solidFill>
-                  <a:schemeClr val="dk1"/>
+                  <a:schemeClr val="accent3">
+                    <a:lumMod val="10000"/>
+                  </a:schemeClr>
                 </a:solidFill>
                 <a:latin typeface="Poppins"/>
                 <a:ea typeface="Poppins"/>
@@ -8351,7 +8272,7 @@
               <a:buFont typeface="Arial" pitchFamily="34" charset="0"/>
               <a:buChar char="•"/>
             </a:pPr>
-            <a:endParaRPr lang="en-US" dirty="0" smtClean="0">
+            <a:endParaRPr lang="en-US" dirty="0">
               <a:solidFill>
                 <a:schemeClr val="dk1"/>
               </a:solidFill>
@@ -8363,7 +8284,7 @@
           </a:p>
           <a:p>
             <a:r>
-              <a:rPr lang="en-US" b="1" dirty="0" smtClean="0">
+              <a:rPr lang="en-US" b="1" dirty="0">
                 <a:solidFill>
                   <a:schemeClr val="dk1"/>
                 </a:solidFill>
@@ -8381,9 +8302,11 @@
               <a:buChar char="v"/>
             </a:pPr>
             <a:r>
-              <a:rPr lang="en-US" dirty="0" smtClean="0">
+              <a:rPr lang="en-US" dirty="0">
                 <a:solidFill>
-                  <a:schemeClr val="dk1"/>
+                  <a:schemeClr val="accent3">
+                    <a:lumMod val="10000"/>
+                  </a:schemeClr>
                 </a:solidFill>
                 <a:latin typeface="Poppins"/>
                 <a:ea typeface="Poppins"/>
@@ -8399,9 +8322,11 @@
               <a:buChar char="v"/>
             </a:pPr>
             <a:r>
-              <a:rPr lang="en-US" dirty="0" smtClean="0">
+              <a:rPr lang="en-US" dirty="0">
                 <a:solidFill>
-                  <a:schemeClr val="dk1"/>
+                  <a:schemeClr val="accent3">
+                    <a:lumMod val="10000"/>
+                  </a:schemeClr>
                 </a:solidFill>
                 <a:latin typeface="Poppins"/>
                 <a:ea typeface="Poppins"/>
@@ -8411,9 +8336,11 @@
               <a:t>Tier-2/3 cities like </a:t>
             </a:r>
             <a:r>
-              <a:rPr lang="en-US" dirty="0" err="1" smtClean="0">
+              <a:rPr lang="en-US" dirty="0" err="1">
                 <a:solidFill>
-                  <a:schemeClr val="dk1"/>
+                  <a:schemeClr val="accent3">
+                    <a:lumMod val="10000"/>
+                  </a:schemeClr>
                 </a:solidFill>
                 <a:latin typeface="Poppins"/>
                 <a:ea typeface="Poppins"/>
@@ -8423,9 +8350,11 @@
               <a:t>Dehradun</a:t>
             </a:r>
             <a:r>
-              <a:rPr lang="en-US" dirty="0" smtClean="0">
+              <a:rPr lang="en-US" dirty="0">
                 <a:solidFill>
-                  <a:schemeClr val="dk1"/>
+                  <a:schemeClr val="accent3">
+                    <a:lumMod val="10000"/>
+                  </a:schemeClr>
                 </a:solidFill>
                 <a:latin typeface="Poppins"/>
                 <a:ea typeface="Poppins"/>
@@ -8440,7 +8369,7 @@
               <a:buFont typeface="Arial" pitchFamily="34" charset="0"/>
               <a:buChar char="•"/>
             </a:pPr>
-            <a:endParaRPr lang="en-US" dirty="0" smtClean="0"/>
+            <a:endParaRPr lang="en-US" dirty="0"/>
           </a:p>
           <a:p>
             <a:endParaRPr lang="en-US" dirty="0"/>
@@ -8452,13 +8381,6 @@
   <p:clrMapOvr>
     <a:masterClrMapping/>
   </p:clrMapOvr>
-  <p:timing>
-    <p:tnLst>
-      <p:par>
-        <p:cTn id="1" dur="indefinite" restart="never" nodeType="tmRoot"/>
-      </p:par>
-    </p:tnLst>
-  </p:timing>
 </p:sld>
 </file>
 
@@ -8502,7 +8424,7 @@
           <a:lstStyle/>
           <a:p>
             <a:r>
-              <a:rPr lang="en-US" b="1" dirty="0" smtClean="0">
+              <a:rPr lang="en-US" b="1" dirty="0">
                 <a:solidFill>
                   <a:schemeClr val="dk1"/>
                 </a:solidFill>
@@ -8520,9 +8442,11 @@
               <a:buChar char="v"/>
             </a:pPr>
             <a:r>
-              <a:rPr lang="en-US" dirty="0" smtClean="0">
+              <a:rPr lang="en-US" dirty="0">
                 <a:solidFill>
-                  <a:schemeClr val="dk1"/>
+                  <a:schemeClr val="accent3">
+                    <a:lumMod val="10000"/>
+                  </a:schemeClr>
                 </a:solidFill>
                 <a:latin typeface="Poppins"/>
                 <a:ea typeface="Poppins"/>
@@ -8538,9 +8462,11 @@
               <a:buChar char="v"/>
             </a:pPr>
             <a:r>
-              <a:rPr lang="en-US" dirty="0" smtClean="0">
+              <a:rPr lang="en-US" dirty="0">
                 <a:solidFill>
-                  <a:schemeClr val="dk1"/>
+                  <a:schemeClr val="accent3">
+                    <a:lumMod val="10000"/>
+                  </a:schemeClr>
                 </a:solidFill>
                 <a:latin typeface="Poppins"/>
                 <a:ea typeface="Poppins"/>
@@ -8552,7 +8478,7 @@
           </a:p>
           <a:p>
             <a:pPr lvl="0"/>
-            <a:endParaRPr lang="en-US" dirty="0" smtClean="0">
+            <a:endParaRPr lang="en-US" dirty="0">
               <a:solidFill>
                 <a:schemeClr val="dk1"/>
               </a:solidFill>
@@ -8564,7 +8490,7 @@
           </a:p>
           <a:p>
             <a:r>
-              <a:rPr lang="en-US" b="1" dirty="0" smtClean="0">
+              <a:rPr lang="en-US" b="1" dirty="0">
                 <a:solidFill>
                   <a:schemeClr val="dk1"/>
                 </a:solidFill>
@@ -8582,9 +8508,11 @@
               <a:buChar char="v"/>
             </a:pPr>
             <a:r>
-              <a:rPr lang="en-US" dirty="0" smtClean="0">
+              <a:rPr lang="en-US" dirty="0">
                 <a:solidFill>
-                  <a:schemeClr val="dk1"/>
+                  <a:schemeClr val="accent3">
+                    <a:lumMod val="10000"/>
+                  </a:schemeClr>
                 </a:solidFill>
                 <a:latin typeface="Poppins"/>
                 <a:ea typeface="Poppins"/>
@@ -8594,9 +8522,11 @@
               <a:t>Clients like </a:t>
             </a:r>
             <a:r>
-              <a:rPr lang="en-US" dirty="0" err="1" smtClean="0">
+              <a:rPr lang="en-US" dirty="0" err="1">
                 <a:solidFill>
-                  <a:schemeClr val="dk1"/>
+                  <a:schemeClr val="accent3">
+                    <a:lumMod val="10000"/>
+                  </a:schemeClr>
                 </a:solidFill>
                 <a:latin typeface="Poppins"/>
                 <a:ea typeface="Poppins"/>
@@ -8606,9 +8536,11 @@
               <a:t>Keer</a:t>
             </a:r>
             <a:r>
-              <a:rPr lang="en-US" dirty="0" smtClean="0">
+              <a:rPr lang="en-US" dirty="0">
                 <a:solidFill>
-                  <a:schemeClr val="dk1"/>
+                  <a:schemeClr val="accent3">
+                    <a:lumMod val="10000"/>
+                  </a:schemeClr>
                 </a:solidFill>
                 <a:latin typeface="Poppins"/>
                 <a:ea typeface="Poppins"/>
@@ -8628,13 +8560,6 @@
   <p:clrMapOvr>
     <a:masterClrMapping/>
   </p:clrMapOvr>
-  <p:timing>
-    <p:tnLst>
-      <p:par>
-        <p:cTn id="1" dur="indefinite" restart="never" nodeType="tmRoot"/>
-      </p:par>
-    </p:tnLst>
-  </p:timing>
 </p:sld>
 </file>
 
@@ -8672,10 +8597,9 @@
           <a:p>
             <a:pPr algn="l"/>
             <a:r>
-              <a:rPr lang="en-US" dirty="0" smtClean="0"/>
+              <a:rPr lang="en-US" dirty="0"/>
               <a:t>Project Introduction</a:t>
             </a:r>
-            <a:endParaRPr lang="en-US" dirty="0"/>
           </a:p>
         </p:txBody>
       </p:sp>
@@ -8715,21 +8639,21 @@
               <a:buChar char="v"/>
             </a:pPr>
             <a:r>
-              <a:rPr lang="en-US" dirty="0" smtClean="0">
+              <a:rPr lang="en-US" dirty="0">
                 <a:latin typeface="Poppins" charset="0"/>
                 <a:cs typeface="Poppins" charset="0"/>
               </a:rPr>
               <a:t>Analysis is based on </a:t>
             </a:r>
             <a:r>
-              <a:rPr lang="en-US" b="1" dirty="0" smtClean="0">
+              <a:rPr lang="en-US" b="1" dirty="0">
                 <a:latin typeface="Poppins" charset="0"/>
                 <a:cs typeface="Poppins" charset="0"/>
               </a:rPr>
               <a:t>60-day</a:t>
             </a:r>
             <a:r>
-              <a:rPr lang="en-US" dirty="0" smtClean="0">
+              <a:rPr lang="en-US" dirty="0">
                 <a:latin typeface="Poppins" charset="0"/>
                 <a:cs typeface="Poppins" charset="0"/>
               </a:rPr>
@@ -8745,14 +8669,14 @@
               <a:buChar char="v"/>
             </a:pPr>
             <a:r>
-              <a:rPr lang="en-US" dirty="0" smtClean="0">
+              <a:rPr lang="en-US" dirty="0">
                 <a:latin typeface="Poppins" charset="0"/>
                 <a:cs typeface="Poppins" charset="0"/>
               </a:rPr>
               <a:t>Total consignments analyzed: </a:t>
             </a:r>
             <a:r>
-              <a:rPr lang="en-US" b="1" dirty="0" smtClean="0">
+              <a:rPr lang="en-US" b="1" dirty="0">
                 <a:latin typeface="Poppins" charset="0"/>
                 <a:cs typeface="Poppins" charset="0"/>
               </a:rPr>
@@ -8768,35 +8692,35 @@
               <a:buChar char="v"/>
             </a:pPr>
             <a:r>
-              <a:rPr lang="en-US" dirty="0" smtClean="0">
+              <a:rPr lang="en-US" dirty="0">
                 <a:latin typeface="Poppins" charset="0"/>
                 <a:cs typeface="Poppins" charset="0"/>
               </a:rPr>
               <a:t>Tools used:</a:t>
             </a:r>
             <a:r>
-              <a:rPr lang="en-US" b="1" dirty="0" smtClean="0">
+              <a:rPr lang="en-US" b="1" dirty="0">
                 <a:latin typeface="Poppins" charset="0"/>
                 <a:cs typeface="Poppins" charset="0"/>
               </a:rPr>
               <a:t> </a:t>
             </a:r>
             <a:r>
-              <a:rPr lang="en-US" b="1" dirty="0" err="1" smtClean="0">
+              <a:rPr lang="en-US" b="1" dirty="0" err="1">
                 <a:latin typeface="Poppins" charset="0"/>
                 <a:cs typeface="Poppins" charset="0"/>
               </a:rPr>
               <a:t>MySQL</a:t>
             </a:r>
             <a:r>
-              <a:rPr lang="en-US" b="1" dirty="0" smtClean="0">
+              <a:rPr lang="en-US" b="1" dirty="0">
                 <a:latin typeface="Poppins" charset="0"/>
                 <a:cs typeface="Poppins" charset="0"/>
               </a:rPr>
               <a:t> </a:t>
             </a:r>
             <a:r>
-              <a:rPr lang="en-US" dirty="0" smtClean="0">
+              <a:rPr lang="en-US" dirty="0">
                 <a:latin typeface="Poppins" charset="0"/>
                 <a:cs typeface="Poppins" charset="0"/>
               </a:rPr>
@@ -8812,7 +8736,7 @@
               <a:buChar char="v"/>
             </a:pPr>
             <a:r>
-              <a:rPr lang="en-US" dirty="0" smtClean="0">
+              <a:rPr lang="en-US" dirty="0">
                 <a:latin typeface="Poppins" charset="0"/>
                 <a:cs typeface="Poppins" charset="0"/>
               </a:rPr>
@@ -8826,7 +8750,7 @@
               </a:lnSpc>
             </a:pPr>
             <a:r>
-              <a:rPr lang="en-US" dirty="0" smtClean="0">
+              <a:rPr lang="en-US" dirty="0">
                 <a:latin typeface="Poppins" charset="0"/>
                 <a:cs typeface="Poppins" charset="0"/>
               </a:rPr>
@@ -8840,7 +8764,7 @@
               </a:lnSpc>
             </a:pPr>
             <a:r>
-              <a:rPr lang="en-US" dirty="0" smtClean="0">
+              <a:rPr lang="en-US" dirty="0">
                 <a:latin typeface="Poppins" charset="0"/>
                 <a:cs typeface="Poppins" charset="0"/>
               </a:rPr>
@@ -8854,7 +8778,7 @@
               </a:lnSpc>
             </a:pPr>
             <a:r>
-              <a:rPr lang="en-US" dirty="0" smtClean="0">
+              <a:rPr lang="en-US" dirty="0">
                 <a:latin typeface="Poppins" charset="0"/>
                 <a:cs typeface="Poppins" charset="0"/>
               </a:rPr>
@@ -8868,7 +8792,7 @@
               </a:lnSpc>
             </a:pPr>
             <a:r>
-              <a:rPr lang="en-US" dirty="0" smtClean="0">
+              <a:rPr lang="en-US" dirty="0">
                 <a:latin typeface="Poppins" charset="0"/>
                 <a:cs typeface="Poppins" charset="0"/>
               </a:rPr>
@@ -8882,7 +8806,7 @@
               </a:lnSpc>
             </a:pPr>
             <a:r>
-              <a:rPr lang="en-US" dirty="0" smtClean="0">
+              <a:rPr lang="en-US" dirty="0">
                 <a:latin typeface="Poppins" charset="0"/>
                 <a:cs typeface="Poppins" charset="0"/>
               </a:rPr>
@@ -8896,7 +8820,7 @@
               </a:lnSpc>
             </a:pPr>
             <a:r>
-              <a:rPr lang="en-US" dirty="0" smtClean="0">
+              <a:rPr lang="en-US" dirty="0">
                 <a:latin typeface="Poppins" charset="0"/>
                 <a:cs typeface="Poppins" charset="0"/>
               </a:rPr>
@@ -8914,13 +8838,6 @@
   <p:clrMapOvr>
     <a:masterClrMapping/>
   </p:clrMapOvr>
-  <p:timing>
-    <p:tnLst>
-      <p:par>
-        <p:cTn id="1" dur="indefinite" restart="never" nodeType="tmRoot"/>
-      </p:par>
-    </p:tnLst>
-  </p:timing>
 </p:sld>
 </file>
 
@@ -8958,10 +8875,9 @@
           <a:p>
             <a:pPr algn="l"/>
             <a:r>
-              <a:rPr lang="en-US" dirty="0" smtClean="0"/>
+              <a:rPr lang="en-US" dirty="0"/>
               <a:t>Conclusion</a:t>
             </a:r>
-            <a:endParaRPr lang="en-US" dirty="0"/>
           </a:p>
         </p:txBody>
       </p:sp>
@@ -8995,7 +8911,7 @@
               <a:buChar char="v"/>
             </a:pPr>
             <a:r>
-              <a:rPr lang="en-US" dirty="0" smtClean="0">
+              <a:rPr lang="en-US" dirty="0">
                 <a:latin typeface="Poppins" charset="0"/>
                 <a:cs typeface="Poppins" charset="0"/>
               </a:rPr>
@@ -9011,7 +8927,7 @@
               <a:buChar char="v"/>
             </a:pPr>
             <a:r>
-              <a:rPr lang="en-US" dirty="0" smtClean="0">
+              <a:rPr lang="en-US" dirty="0">
                 <a:latin typeface="Poppins" charset="0"/>
                 <a:cs typeface="Poppins" charset="0"/>
               </a:rPr>
@@ -9027,7 +8943,7 @@
               <a:buChar char="v"/>
             </a:pPr>
             <a:r>
-              <a:rPr lang="en-US" dirty="0" smtClean="0">
+              <a:rPr lang="en-US" dirty="0">
                 <a:latin typeface="Poppins" charset="0"/>
                 <a:cs typeface="Poppins" charset="0"/>
               </a:rPr>
@@ -9043,7 +8959,7 @@
               <a:buChar char="v"/>
             </a:pPr>
             <a:r>
-              <a:rPr lang="en-US" dirty="0" smtClean="0">
+              <a:rPr lang="en-US" dirty="0">
                 <a:latin typeface="Poppins" charset="0"/>
                 <a:cs typeface="Poppins" charset="0"/>
               </a:rPr>
@@ -9059,7 +8975,7 @@
               <a:buChar char="v"/>
             </a:pPr>
             <a:r>
-              <a:rPr lang="en-US" dirty="0" smtClean="0">
+              <a:rPr lang="en-US" dirty="0">
                 <a:latin typeface="Poppins" charset="0"/>
                 <a:cs typeface="Poppins" charset="0"/>
               </a:rPr>
@@ -9080,13 +8996,6 @@
   <p:clrMapOvr>
     <a:masterClrMapping/>
   </p:clrMapOvr>
-  <p:timing>
-    <p:tnLst>
-      <p:par>
-        <p:cTn id="1" dur="indefinite" restart="never" nodeType="tmRoot"/>
-      </p:par>
-    </p:tnLst>
-  </p:timing>
 </p:sld>
 </file>
 
@@ -9128,10 +9037,9 @@
           <a:lstStyle/>
           <a:p>
             <a:r>
-              <a:rPr lang="en-US" sz="5400" dirty="0" smtClean="0"/>
+              <a:rPr lang="en-US" sz="5400" dirty="0"/>
               <a:t>THANK YOU !</a:t>
             </a:r>
-            <a:endParaRPr lang="en-US" sz="5400" dirty="0"/>
           </a:p>
         </p:txBody>
       </p:sp>
@@ -9163,7 +9071,7 @@
               </a:lnSpc>
             </a:pPr>
             <a:r>
-              <a:rPr lang="en-US" sz="1600" b="1" dirty="0" err="1" smtClean="0">
+              <a:rPr lang="en-US" sz="1600" b="1" dirty="0" err="1">
                 <a:solidFill>
                   <a:schemeClr val="dk1"/>
                 </a:solidFill>
@@ -9175,7 +9083,7 @@
               <a:t>Shubham</a:t>
             </a:r>
             <a:r>
-              <a:rPr lang="en-US" sz="1600" b="1" dirty="0" smtClean="0">
+              <a:rPr lang="en-US" sz="1600" b="1" dirty="0">
                 <a:solidFill>
                   <a:schemeClr val="dk1"/>
                 </a:solidFill>
@@ -9187,7 +9095,7 @@
               <a:t> </a:t>
             </a:r>
             <a:r>
-              <a:rPr lang="en-US" sz="1600" b="1" dirty="0" err="1" smtClean="0">
+              <a:rPr lang="en-US" sz="1600" b="1" dirty="0" err="1">
                 <a:solidFill>
                   <a:schemeClr val="dk1"/>
                 </a:solidFill>
@@ -9198,7 +9106,7 @@
               </a:rPr>
               <a:t>Patil</a:t>
             </a:r>
-            <a:endParaRPr lang="en-US" sz="1600" b="1" dirty="0" smtClean="0">
+            <a:endParaRPr lang="en-US" sz="1600" b="1" dirty="0">
               <a:solidFill>
                 <a:schemeClr val="dk1"/>
               </a:solidFill>
@@ -9215,7 +9123,7 @@
               </a:lnSpc>
             </a:pPr>
             <a:r>
-              <a:rPr lang="en-US" b="1" dirty="0" err="1" smtClean="0">
+              <a:rPr lang="en-US" b="1" dirty="0" err="1">
                 <a:solidFill>
                   <a:schemeClr val="dk1"/>
                 </a:solidFill>
@@ -9227,7 +9135,7 @@
               <a:t>Github</a:t>
             </a:r>
             <a:r>
-              <a:rPr lang="en-US" b="1" dirty="0" smtClean="0">
+              <a:rPr lang="en-US" b="1" dirty="0">
                 <a:solidFill>
                   <a:schemeClr val="dk1"/>
                 </a:solidFill>
@@ -9239,21 +9147,21 @@
               <a:t> link</a:t>
             </a:r>
             <a:r>
-              <a:rPr lang="en-US" b="1" dirty="0" smtClean="0">
+              <a:rPr lang="en-US" b="1" dirty="0">
                 <a:latin typeface="Poppins" charset="0"/>
                 <a:cs typeface="Poppins" charset="0"/>
               </a:rPr>
               <a:t>: </a:t>
             </a:r>
             <a:r>
-              <a:rPr lang="en-US" dirty="0" err="1" smtClean="0">
+              <a:rPr lang="en-US" dirty="0" err="1">
                 <a:latin typeface="Poppins" charset="0"/>
                 <a:cs typeface="Poppins" charset="0"/>
               </a:rPr>
               <a:t>shubhampatil</a:t>
             </a:r>
             <a:r>
-              <a:rPr lang="en-US" dirty="0" smtClean="0">
+              <a:rPr lang="en-US" dirty="0">
                 <a:latin typeface="Poppins" charset="0"/>
                 <a:cs typeface="Poppins" charset="0"/>
               </a:rPr>
@@ -9267,7 +9175,7 @@
               </a:lnSpc>
             </a:pPr>
             <a:r>
-              <a:rPr lang="en-US" b="1" dirty="0" err="1" smtClean="0">
+              <a:rPr lang="en-US" b="1" dirty="0" err="1">
                 <a:solidFill>
                   <a:schemeClr val="dk1"/>
                 </a:solidFill>
@@ -9279,7 +9187,7 @@
               <a:t>Linkedin</a:t>
             </a:r>
             <a:r>
-              <a:rPr lang="en-US" b="1" dirty="0" smtClean="0">
+              <a:rPr lang="en-US" b="1" dirty="0">
                 <a:solidFill>
                   <a:schemeClr val="dk1"/>
                 </a:solidFill>
@@ -9291,7 +9199,7 @@
               <a:t> Link: </a:t>
             </a:r>
             <a:r>
-              <a:rPr lang="en-US" dirty="0" smtClean="0">
+              <a:rPr lang="en-US" dirty="0">
                 <a:latin typeface="Poppins" charset="0"/>
                 <a:cs typeface="Poppins" charset="0"/>
               </a:rPr>
@@ -9305,7 +9213,7 @@
               </a:lnSpc>
             </a:pPr>
             <a:r>
-              <a:rPr lang="en-US" b="1" dirty="0" smtClean="0">
+              <a:rPr lang="en-US" b="1" dirty="0">
                 <a:solidFill>
                   <a:schemeClr val="dk1"/>
                 </a:solidFill>
@@ -9317,7 +9225,7 @@
               <a:t>Email-ID : </a:t>
             </a:r>
             <a:r>
-              <a:rPr lang="en-US" dirty="0" smtClean="0">
+              <a:rPr lang="en-US" dirty="0">
                 <a:latin typeface="Poppins" charset="0"/>
                 <a:cs typeface="Poppins" charset="0"/>
               </a:rPr>
@@ -9334,13 +9242,6 @@
   <p:clrMapOvr>
     <a:masterClrMapping/>
   </p:clrMapOvr>
-  <p:timing>
-    <p:tnLst>
-      <p:par>
-        <p:cTn id="1" dur="indefinite" restart="never" nodeType="tmRoot"/>
-      </p:par>
-    </p:tnLst>
-  </p:timing>
 </p:sld>
 </file>
 
@@ -9382,11 +9283,11 @@
           <a:lstStyle/>
           <a:p>
             <a:r>
-              <a:rPr lang="en-US" sz="3600" dirty="0" smtClean="0"/>
+              <a:rPr lang="en-US" sz="3600" dirty="0"/>
               <a:t>Project Objective</a:t>
             </a:r>
             <a:br>
-              <a:rPr lang="en-US" sz="3600" dirty="0" smtClean="0"/>
+              <a:rPr lang="en-US" sz="3600" dirty="0"/>
             </a:br>
             <a:endParaRPr lang="en-US" sz="3600" dirty="0"/>
           </a:p>
@@ -9416,30 +9317,26 @@
           <a:p>
             <a:pPr algn="ctr"/>
             <a:r>
-              <a:rPr lang="en-US" dirty="0" smtClean="0">
+              <a:rPr lang="en-US" dirty="0">
                 <a:latin typeface="Poppins" charset="0"/>
                 <a:cs typeface="Poppins" charset="0"/>
               </a:rPr>
               <a:t>Leveraging </a:t>
             </a:r>
             <a:r>
-              <a:rPr lang="en-US" dirty="0" err="1" smtClean="0">
+              <a:rPr lang="en-US" dirty="0" err="1">
                 <a:latin typeface="Poppins" charset="0"/>
                 <a:cs typeface="Poppins" charset="0"/>
               </a:rPr>
               <a:t>MySQL</a:t>
             </a:r>
             <a:r>
-              <a:rPr lang="en-US" dirty="0" smtClean="0">
+              <a:rPr lang="en-US" dirty="0">
                 <a:latin typeface="Poppins" charset="0"/>
                 <a:cs typeface="Poppins" charset="0"/>
               </a:rPr>
               <a:t> to diagnose inefficiencies in DTDC’s consignment operations.</a:t>
             </a:r>
-            <a:endParaRPr lang="en-US" dirty="0">
-              <a:latin typeface="Poppins" charset="0"/>
-              <a:cs typeface="Poppins" charset="0"/>
-            </a:endParaRPr>
           </a:p>
         </p:txBody>
       </p:sp>
@@ -9448,13 +9345,6 @@
   <p:clrMapOvr>
     <a:masterClrMapping/>
   </p:clrMapOvr>
-  <p:timing>
-    <p:tnLst>
-      <p:par>
-        <p:cTn id="1" dur="indefinite" restart="never" nodeType="tmRoot"/>
-      </p:par>
-    </p:tnLst>
-  </p:timing>
 </p:sld>
 </file>
 
@@ -9492,10 +9382,9 @@
           <a:p>
             <a:pPr algn="l"/>
             <a:r>
-              <a:rPr lang="en-US" dirty="0" smtClean="0"/>
+              <a:rPr lang="en-US" dirty="0"/>
               <a:t>Logistics performance indicators</a:t>
             </a:r>
-            <a:endParaRPr lang="en-US" dirty="0"/>
           </a:p>
         </p:txBody>
       </p:sp>
@@ -9559,7 +9448,7 @@
               <a:buAutoNum type="arabicPeriod"/>
             </a:pPr>
             <a:r>
-              <a:rPr lang="en-US" sz="1800" b="1" dirty="0" smtClean="0">
+              <a:rPr lang="en-US" sz="1800" b="1" dirty="0">
                 <a:solidFill>
                   <a:schemeClr val="dk1"/>
                 </a:solidFill>
@@ -9580,13 +9469,13 @@
               <a:buChar char="v"/>
             </a:pPr>
             <a:r>
-              <a:rPr lang="en-US" dirty="0" smtClean="0">
+              <a:rPr lang="en-US" dirty="0">
                 <a:latin typeface="Poppins" charset="0"/>
                 <a:cs typeface="Poppins" charset="0"/>
               </a:rPr>
               <a:t>What is the average turnaround time and standard deviation per mode of transport?</a:t>
             </a:r>
-            <a:endParaRPr lang="en-US" sz="1600" b="1" dirty="0" smtClean="0">
+            <a:endParaRPr lang="en-US" sz="1600" b="1" dirty="0">
               <a:latin typeface="Poppins" charset="0"/>
               <a:cs typeface="Poppins" charset="0"/>
             </a:endParaRPr>
@@ -9600,13 +9489,13 @@
               <a:buChar char="v"/>
             </a:pPr>
             <a:r>
-              <a:rPr lang="en-US" dirty="0" smtClean="0">
+              <a:rPr lang="en-US" dirty="0">
                 <a:latin typeface="Poppins" charset="0"/>
                 <a:cs typeface="Poppins" charset="0"/>
               </a:rPr>
               <a:t>How many consignments were handled per day?</a:t>
             </a:r>
-            <a:endParaRPr lang="en-US" sz="1200" dirty="0" smtClean="0">
+            <a:endParaRPr lang="en-US" sz="1200" dirty="0">
               <a:latin typeface="Poppins" charset="0"/>
               <a:cs typeface="Poppins" charset="0"/>
             </a:endParaRPr>
@@ -9620,13 +9509,13 @@
               <a:buChar char="v"/>
             </a:pPr>
             <a:r>
-              <a:rPr lang="en-US" dirty="0" smtClean="0">
+              <a:rPr lang="en-US" dirty="0">
                 <a:latin typeface="Poppins" charset="0"/>
                 <a:cs typeface="Poppins" charset="0"/>
               </a:rPr>
               <a:t>Max and min number of consignments handled per day.</a:t>
             </a:r>
-            <a:endParaRPr lang="en-US" sz="1200" dirty="0" smtClean="0">
+            <a:endParaRPr lang="en-US" sz="1200" dirty="0">
               <a:latin typeface="Poppins" charset="0"/>
               <a:cs typeface="Poppins" charset="0"/>
             </a:endParaRPr>
@@ -9640,13 +9529,13 @@
               <a:buChar char="v"/>
             </a:pPr>
             <a:r>
-              <a:rPr lang="en-US" dirty="0" smtClean="0">
+              <a:rPr lang="en-US" dirty="0">
                 <a:latin typeface="Poppins" charset="0"/>
                 <a:cs typeface="Poppins" charset="0"/>
               </a:rPr>
               <a:t>Number of days where number of consignments are above average.</a:t>
             </a:r>
-            <a:endParaRPr lang="en-US" sz="1200" dirty="0" smtClean="0">
+            <a:endParaRPr lang="en-US" sz="1200" dirty="0">
               <a:latin typeface="Poppins" charset="0"/>
               <a:cs typeface="Poppins" charset="0"/>
             </a:endParaRPr>
@@ -9660,13 +9549,13 @@
               <a:buChar char="v"/>
             </a:pPr>
             <a:r>
-              <a:rPr lang="en-US" dirty="0" smtClean="0">
+              <a:rPr lang="en-US" dirty="0">
                 <a:latin typeface="Poppins" charset="0"/>
                 <a:cs typeface="Poppins" charset="0"/>
               </a:rPr>
               <a:t>Which top 5 booking codes experience higher delivery times across cities?</a:t>
             </a:r>
-            <a:endParaRPr lang="en-US" sz="1200" dirty="0" smtClean="0">
+            <a:endParaRPr lang="en-US" sz="1200" dirty="0">
               <a:latin typeface="Poppins" charset="0"/>
               <a:cs typeface="Poppins" charset="0"/>
             </a:endParaRPr>
@@ -9680,13 +9569,13 @@
               <a:buChar char="v"/>
             </a:pPr>
             <a:r>
-              <a:rPr lang="en-US" dirty="0" smtClean="0">
+              <a:rPr lang="en-US" dirty="0">
                 <a:latin typeface="Poppins" charset="0"/>
                 <a:cs typeface="Poppins" charset="0"/>
               </a:rPr>
               <a:t>Identify count of shipments where the delivery gap is unusually high compared to similar routes.</a:t>
             </a:r>
-            <a:endParaRPr lang="en-US" sz="1200" dirty="0" smtClean="0">
+            <a:endParaRPr lang="en-US" sz="1200" dirty="0">
               <a:latin typeface="Poppins" charset="0"/>
               <a:cs typeface="Poppins" charset="0"/>
             </a:endParaRPr>
@@ -9705,13 +9594,6 @@
   <p:clrMapOvr>
     <a:masterClrMapping/>
   </p:clrMapOvr>
-  <p:timing>
-    <p:tnLst>
-      <p:par>
-        <p:cTn id="1" dur="indefinite" restart="never" nodeType="tmRoot"/>
-      </p:par>
-    </p:tnLst>
-  </p:timing>
 </p:sld>
 </file>
 
@@ -9790,7 +9672,7 @@
               </a:lnSpc>
             </a:pPr>
             <a:r>
-              <a:rPr lang="en-US" sz="1800" b="1" dirty="0" smtClean="0">
+              <a:rPr lang="en-US" sz="1800" b="1" dirty="0">
                 <a:solidFill>
                   <a:schemeClr val="dk1"/>
                 </a:solidFill>
@@ -9811,7 +9693,7 @@
               <a:buChar char="v"/>
             </a:pPr>
             <a:r>
-              <a:rPr lang="en-US" dirty="0" smtClean="0">
+              <a:rPr lang="en-US" dirty="0">
                 <a:latin typeface="Poppins" charset="0"/>
                 <a:cs typeface="Poppins" charset="0"/>
               </a:rPr>
@@ -9827,7 +9709,7 @@
               <a:buChar char="v"/>
             </a:pPr>
             <a:r>
-              <a:rPr lang="en-US" dirty="0" smtClean="0">
+              <a:rPr lang="en-US" dirty="0">
                 <a:latin typeface="Poppins" charset="0"/>
                 <a:cs typeface="Poppins" charset="0"/>
               </a:rPr>
@@ -9843,7 +9725,7 @@
               <a:buChar char="v"/>
             </a:pPr>
             <a:r>
-              <a:rPr lang="en-US" dirty="0" smtClean="0">
+              <a:rPr lang="en-US" dirty="0">
                 <a:latin typeface="Poppins" charset="0"/>
                 <a:cs typeface="Poppins" charset="0"/>
               </a:rPr>
@@ -9859,7 +9741,7 @@
               <a:buChar char="v"/>
             </a:pPr>
             <a:r>
-              <a:rPr lang="en-US" dirty="0" smtClean="0">
+              <a:rPr lang="en-US" dirty="0">
                 <a:latin typeface="Poppins" charset="0"/>
                 <a:cs typeface="Poppins" charset="0"/>
               </a:rPr>
@@ -9873,7 +9755,7 @@
               </a:lnSpc>
             </a:pPr>
             <a:r>
-              <a:rPr lang="en-US" sz="1800" b="1" dirty="0" smtClean="0">
+              <a:rPr lang="en-US" sz="1800" b="1" dirty="0">
                 <a:solidFill>
                   <a:schemeClr val="dk1"/>
                 </a:solidFill>
@@ -9894,7 +9776,7 @@
               <a:buChar char="v"/>
             </a:pPr>
             <a:r>
-              <a:rPr lang="en-US" dirty="0" smtClean="0">
+              <a:rPr lang="en-US" dirty="0">
                 <a:latin typeface="Poppins" charset="0"/>
                 <a:cs typeface="Poppins" charset="0"/>
               </a:rPr>
@@ -9910,7 +9792,7 @@
               <a:buChar char="v"/>
             </a:pPr>
             <a:r>
-              <a:rPr lang="en-US" dirty="0" smtClean="0">
+              <a:rPr lang="en-US" dirty="0">
                 <a:latin typeface="Poppins" charset="0"/>
                 <a:cs typeface="Poppins" charset="0"/>
               </a:rPr>
@@ -9926,7 +9808,7 @@
               <a:buChar char="v"/>
             </a:pPr>
             <a:r>
-              <a:rPr lang="en-US" dirty="0" smtClean="0">
+              <a:rPr lang="en-US" dirty="0">
                 <a:latin typeface="Poppins" charset="0"/>
                 <a:cs typeface="Poppins" charset="0"/>
               </a:rPr>
@@ -9938,7 +9820,7 @@
               <a:buFont typeface="Arial" pitchFamily="34" charset="0"/>
               <a:buChar char="•"/>
             </a:pPr>
-            <a:endParaRPr lang="en-US" dirty="0" smtClean="0"/>
+            <a:endParaRPr lang="en-US" dirty="0"/>
           </a:p>
           <a:p>
             <a:pPr marL="342900" indent="-342900"/>
@@ -9951,13 +9833,6 @@
   <p:clrMapOvr>
     <a:masterClrMapping/>
   </p:clrMapOvr>
-  <p:timing>
-    <p:tnLst>
-      <p:par>
-        <p:cTn id="1" dur="indefinite" restart="never" nodeType="tmRoot"/>
-      </p:par>
-    </p:tnLst>
-  </p:timing>
 </p:sld>
 </file>
 
@@ -10036,7 +9911,7 @@
               </a:lnSpc>
             </a:pPr>
             <a:r>
-              <a:rPr lang="en-US" sz="1800" b="1" dirty="0" smtClean="0">
+              <a:rPr lang="en-US" sz="1800" b="1" dirty="0">
                 <a:solidFill>
                   <a:schemeClr val="dk1"/>
                 </a:solidFill>
@@ -10057,7 +9932,7 @@
               <a:buChar char="v"/>
             </a:pPr>
             <a:r>
-              <a:rPr lang="en-US" dirty="0" smtClean="0">
+              <a:rPr lang="en-US" dirty="0">
                 <a:latin typeface="Poppins" charset="0"/>
                 <a:cs typeface="Poppins" charset="0"/>
               </a:rPr>
@@ -10073,7 +9948,7 @@
               <a:buChar char="v"/>
             </a:pPr>
             <a:r>
-              <a:rPr lang="en-US" dirty="0" smtClean="0">
+              <a:rPr lang="en-US" dirty="0">
                 <a:latin typeface="Poppins" charset="0"/>
                 <a:cs typeface="Poppins" charset="0"/>
               </a:rPr>
@@ -10089,13 +9964,13 @@
               <a:buChar char="v"/>
             </a:pPr>
             <a:r>
-              <a:rPr lang="en-US" dirty="0" smtClean="0">
+              <a:rPr lang="en-US" dirty="0">
                 <a:latin typeface="Poppins" charset="0"/>
                 <a:cs typeface="Poppins" charset="0"/>
               </a:rPr>
               <a:t>Identify top 5 senders state contributing highest total revenue across all consignments, their vas charge margin and profitability index. </a:t>
             </a:r>
-            <a:endParaRPr lang="en-US" dirty="0" smtClean="0"/>
+            <a:endParaRPr lang="en-US" dirty="0"/>
           </a:p>
           <a:p>
             <a:pPr marL="342900" indent="-342900">
@@ -10104,7 +9979,7 @@
               </a:lnSpc>
             </a:pPr>
             <a:r>
-              <a:rPr lang="en-US" sz="1800" b="1" dirty="0" smtClean="0">
+              <a:rPr lang="en-US" sz="1800" b="1" dirty="0">
                 <a:solidFill>
                   <a:schemeClr val="dk1"/>
                 </a:solidFill>
@@ -10125,35 +10000,35 @@
               <a:buChar char="v"/>
             </a:pPr>
             <a:r>
-              <a:rPr lang="en-US" dirty="0" smtClean="0">
+              <a:rPr lang="en-US" dirty="0">
                 <a:latin typeface="Poppins" charset="0"/>
                 <a:cs typeface="Poppins" charset="0"/>
               </a:rPr>
               <a:t>Count Consignments where </a:t>
             </a:r>
             <a:r>
-              <a:rPr lang="en-US" dirty="0" err="1" smtClean="0">
+              <a:rPr lang="en-US" dirty="0" err="1">
                 <a:latin typeface="Poppins" charset="0"/>
                 <a:cs typeface="Poppins" charset="0"/>
               </a:rPr>
               <a:t>chargeable_wt</a:t>
             </a:r>
             <a:r>
-              <a:rPr lang="en-US" dirty="0" smtClean="0">
+              <a:rPr lang="en-US" dirty="0">
                 <a:latin typeface="Poppins" charset="0"/>
                 <a:cs typeface="Poppins" charset="0"/>
               </a:rPr>
               <a:t> deviates significantly &gt; 2kg from </a:t>
             </a:r>
             <a:r>
-              <a:rPr lang="en-US" dirty="0" err="1" smtClean="0">
+              <a:rPr lang="en-US" dirty="0" err="1">
                 <a:latin typeface="Poppins" charset="0"/>
                 <a:cs typeface="Poppins" charset="0"/>
               </a:rPr>
               <a:t>actual_wt</a:t>
             </a:r>
             <a:r>
-              <a:rPr lang="en-US" dirty="0" smtClean="0">
+              <a:rPr lang="en-US" dirty="0">
                 <a:latin typeface="Poppins" charset="0"/>
                 <a:cs typeface="Poppins" charset="0"/>
               </a:rPr>
@@ -10169,7 +10044,7 @@
               <a:buChar char="v"/>
             </a:pPr>
             <a:r>
-              <a:rPr lang="en-US" dirty="0" smtClean="0">
+              <a:rPr lang="en-US" dirty="0">
                 <a:latin typeface="Poppins" charset="0"/>
                 <a:cs typeface="Poppins" charset="0"/>
               </a:rPr>
@@ -10183,7 +10058,7 @@
               </a:lnSpc>
             </a:pPr>
             <a:r>
-              <a:rPr lang="en-US" sz="1800" b="1" dirty="0" smtClean="0">
+              <a:rPr lang="en-US" sz="1800" b="1" dirty="0">
                 <a:solidFill>
                   <a:schemeClr val="dk1"/>
                 </a:solidFill>
@@ -10204,7 +10079,7 @@
               <a:buChar char="v"/>
             </a:pPr>
             <a:r>
-              <a:rPr lang="en-US" dirty="0" smtClean="0">
+              <a:rPr lang="en-US" dirty="0">
                 <a:latin typeface="Poppins" charset="0"/>
                 <a:cs typeface="Poppins" charset="0"/>
               </a:rPr>
@@ -10217,7 +10092,7 @@
                 <a:spcPct val="150000"/>
               </a:lnSpc>
             </a:pPr>
-            <a:endParaRPr lang="en-US" sz="1800" b="1" dirty="0" smtClean="0">
+            <a:endParaRPr lang="en-US" sz="1800" b="1" dirty="0">
               <a:solidFill>
                 <a:schemeClr val="dk1"/>
               </a:solidFill>
@@ -10235,7 +10110,7 @@
               <a:buFont typeface="Arial" pitchFamily="34" charset="0"/>
               <a:buChar char="•"/>
             </a:pPr>
-            <a:endParaRPr lang="en-US" dirty="0" smtClean="0">
+            <a:endParaRPr lang="en-US" dirty="0">
               <a:latin typeface="Poppins" charset="0"/>
               <a:cs typeface="Poppins" charset="0"/>
             </a:endParaRPr>
@@ -10245,21 +10120,21 @@
               <a:buFont typeface="Arial" pitchFamily="34" charset="0"/>
               <a:buChar char="•"/>
             </a:pPr>
-            <a:endParaRPr lang="en-US" sz="1200" dirty="0" smtClean="0"/>
+            <a:endParaRPr lang="en-US" sz="1200" dirty="0"/>
           </a:p>
           <a:p>
             <a:pPr lvl="1">
               <a:buFont typeface="Arial" pitchFamily="34" charset="0"/>
               <a:buChar char="•"/>
             </a:pPr>
-            <a:endParaRPr lang="en-US" sz="1200" dirty="0" smtClean="0"/>
+            <a:endParaRPr lang="en-US" sz="1200" dirty="0"/>
           </a:p>
           <a:p>
             <a:pPr marL="342900" lvl="0" indent="-342900">
               <a:buFont typeface="Arial" pitchFamily="34" charset="0"/>
               <a:buChar char="•"/>
             </a:pPr>
-            <a:endParaRPr lang="en-US" dirty="0" smtClean="0"/>
+            <a:endParaRPr lang="en-US" dirty="0"/>
           </a:p>
           <a:p>
             <a:pPr marL="342900" indent="-342900"/>
@@ -10272,13 +10147,6 @@
   <p:clrMapOvr>
     <a:masterClrMapping/>
   </p:clrMapOvr>
-  <p:timing>
-    <p:tnLst>
-      <p:par>
-        <p:cTn id="1" dur="indefinite" restart="never" nodeType="tmRoot"/>
-      </p:par>
-    </p:tnLst>
-  </p:timing>
 </p:sld>
 </file>
 
@@ -10316,11 +10184,11 @@
           <a:p>
             <a:pPr algn="l"/>
             <a:r>
-              <a:rPr lang="en-US" dirty="0" smtClean="0"/>
+              <a:rPr lang="en-US" dirty="0"/>
               <a:t>Important SQL Snippets</a:t>
             </a:r>
             <a:br>
-              <a:rPr lang="en-US" dirty="0" smtClean="0"/>
+              <a:rPr lang="en-US" dirty="0"/>
             </a:br>
             <a:endParaRPr lang="en-US" dirty="0"/>
           </a:p>
@@ -10350,7 +10218,7 @@
           <a:p>
             <a:pPr marL="342900" indent="-342900"/>
             <a:r>
-              <a:rPr lang="en-US" dirty="0" smtClean="0">
+              <a:rPr lang="en-US" dirty="0">
                 <a:latin typeface="Poppins" charset="0"/>
                 <a:cs typeface="Poppins" charset="0"/>
               </a:rPr>
@@ -10448,7 +10316,7 @@
           <a:lstStyle/>
           <a:p>
             <a:r>
-              <a:rPr lang="en-US" b="1" dirty="0" smtClean="0">
+              <a:rPr lang="en-US" b="1" dirty="0">
                 <a:solidFill>
                   <a:schemeClr val="dk1"/>
                 </a:solidFill>
@@ -10460,16 +10328,12 @@
               <a:t>Output</a:t>
             </a:r>
             <a:r>
-              <a:rPr lang="en-US" sz="900" b="1" dirty="0" smtClean="0">
+              <a:rPr lang="en-US" sz="900" b="1" dirty="0">
                 <a:latin typeface="Poppins" charset="0"/>
                 <a:cs typeface="Poppins" charset="0"/>
               </a:rPr>
               <a:t>: </a:t>
             </a:r>
-            <a:endParaRPr lang="en-US" sz="900" b="1" dirty="0">
-              <a:latin typeface="Poppins" charset="0"/>
-              <a:cs typeface="Poppins" charset="0"/>
-            </a:endParaRPr>
           </a:p>
         </p:txBody>
       </p:sp>
@@ -10496,7 +10360,7 @@
           <a:lstStyle/>
           <a:p>
             <a:r>
-              <a:rPr lang="en-US" b="1" dirty="0" smtClean="0">
+              <a:rPr lang="en-US" b="1" dirty="0">
                 <a:solidFill>
                   <a:schemeClr val="dk1"/>
                 </a:solidFill>
@@ -10508,14 +10372,14 @@
               <a:t>Analysis</a:t>
             </a:r>
             <a:r>
-              <a:rPr lang="en-US" dirty="0" smtClean="0">
+              <a:rPr lang="en-US" dirty="0">
                 <a:latin typeface="Poppins" charset="0"/>
                 <a:cs typeface="Poppins" charset="0"/>
               </a:rPr>
               <a:t>: All modes deliver in ~3 days with minimal variation (SD: 1.4–1.42), showing </a:t>
             </a:r>
             <a:r>
-              <a:rPr lang="en-US" b="1" dirty="0" smtClean="0">
+              <a:rPr lang="en-US" b="1" dirty="0">
                 <a:solidFill>
                   <a:schemeClr val="dk1"/>
                 </a:solidFill>
@@ -10527,16 +10391,12 @@
               <a:t>consistent</a:t>
             </a:r>
             <a:r>
-              <a:rPr lang="en-US" dirty="0" smtClean="0">
+              <a:rPr lang="en-US" dirty="0">
                 <a:latin typeface="Poppins" charset="0"/>
                 <a:cs typeface="Poppins" charset="0"/>
               </a:rPr>
               <a:t> turnaround performance across Air, Express, and Surface.</a:t>
             </a:r>
-            <a:endParaRPr lang="en-US" dirty="0">
-              <a:latin typeface="Poppins" charset="0"/>
-              <a:cs typeface="Poppins" charset="0"/>
-            </a:endParaRPr>
           </a:p>
         </p:txBody>
       </p:sp>
@@ -10545,13 +10405,6 @@
   <p:clrMapOvr>
     <a:masterClrMapping/>
   </p:clrMapOvr>
-  <p:timing>
-    <p:tnLst>
-      <p:par>
-        <p:cTn id="1" dur="indefinite" restart="never" nodeType="tmRoot"/>
-      </p:par>
-    </p:tnLst>
-  </p:timing>
 </p:sld>
 </file>
 
@@ -10625,7 +10478,7 @@
           <a:lstStyle/>
           <a:p>
             <a:r>
-              <a:rPr lang="en-US" dirty="0" smtClean="0">
+              <a:rPr lang="en-US" dirty="0">
                 <a:latin typeface="Poppins" charset="0"/>
                 <a:cs typeface="Poppins" charset="0"/>
               </a:rPr>
@@ -10690,7 +10543,7 @@
           <a:lstStyle/>
           <a:p>
             <a:r>
-              <a:rPr lang="en-US" b="1" dirty="0" smtClean="0">
+              <a:rPr lang="en-US" b="1" dirty="0">
                 <a:solidFill>
                   <a:schemeClr val="dk1"/>
                 </a:solidFill>
@@ -10702,16 +10555,12 @@
               <a:t>Output</a:t>
             </a:r>
             <a:r>
-              <a:rPr lang="en-US" sz="900" b="1" dirty="0" smtClean="0">
+              <a:rPr lang="en-US" sz="900" b="1" dirty="0">
                 <a:latin typeface="Poppins" charset="0"/>
                 <a:cs typeface="Poppins" charset="0"/>
               </a:rPr>
               <a:t>: </a:t>
             </a:r>
-            <a:endParaRPr lang="en-US" sz="900" b="1" dirty="0">
-              <a:latin typeface="Poppins" charset="0"/>
-              <a:cs typeface="Poppins" charset="0"/>
-            </a:endParaRPr>
           </a:p>
         </p:txBody>
       </p:sp>
@@ -10738,7 +10587,7 @@
           <a:lstStyle/>
           <a:p>
             <a:r>
-              <a:rPr lang="en-US" b="1" dirty="0" smtClean="0">
+              <a:rPr lang="en-US" b="1" dirty="0">
                 <a:solidFill>
                   <a:schemeClr val="dk1"/>
                 </a:solidFill>
@@ -10750,14 +10599,14 @@
               <a:t>Analysis</a:t>
             </a:r>
             <a:r>
-              <a:rPr lang="en-US" dirty="0" smtClean="0">
+              <a:rPr lang="en-US" dirty="0">
                 <a:latin typeface="Poppins" charset="0"/>
                 <a:cs typeface="Poppins" charset="0"/>
               </a:rPr>
               <a:t>: Average consignment volume is only exceeded on </a:t>
             </a:r>
             <a:r>
-              <a:rPr lang="en-US" b="1" dirty="0" smtClean="0">
+              <a:rPr lang="en-US" b="1" dirty="0">
                 <a:solidFill>
                   <a:schemeClr val="dk1"/>
                 </a:solidFill>
@@ -10769,7 +10618,7 @@
               <a:t>23% </a:t>
             </a:r>
             <a:r>
-              <a:rPr lang="en-US" dirty="0" smtClean="0">
+              <a:rPr lang="en-US" dirty="0">
                 <a:latin typeface="Poppins" charset="0"/>
                 <a:cs typeface="Poppins" charset="0"/>
               </a:rPr>
@@ -10777,7 +10626,7 @@
             </a:r>
           </a:p>
           <a:p>
-            <a:endParaRPr lang="en-US" dirty="0" smtClean="0">
+            <a:endParaRPr lang="en-US" dirty="0">
               <a:latin typeface="Poppins" charset="0"/>
               <a:cs typeface="Poppins" charset="0"/>
             </a:endParaRPr>
@@ -10819,13 +10668,6 @@
   <p:clrMapOvr>
     <a:masterClrMapping/>
   </p:clrMapOvr>
-  <p:timing>
-    <p:tnLst>
-      <p:par>
-        <p:cTn id="1" dur="indefinite" restart="never" nodeType="tmRoot"/>
-      </p:par>
-    </p:tnLst>
-  </p:timing>
 </p:sld>
 </file>
 
@@ -10869,7 +10711,7 @@
           <a:lstStyle/>
           <a:p>
             <a:r>
-              <a:rPr lang="en-US" dirty="0" smtClean="0">
+              <a:rPr lang="en-US" dirty="0">
                 <a:latin typeface="Poppins" charset="0"/>
                 <a:cs typeface="Poppins" charset="0"/>
               </a:rPr>
@@ -10902,7 +10744,7 @@
           <a:lstStyle/>
           <a:p>
             <a:r>
-              <a:rPr lang="en-US" dirty="0" smtClean="0">
+              <a:rPr lang="en-US" dirty="0">
                 <a:latin typeface="Poppins" charset="0"/>
                 <a:cs typeface="Poppins" charset="0"/>
               </a:rPr>
@@ -10910,7 +10752,7 @@
             </a:r>
           </a:p>
           <a:p>
-            <a:endParaRPr lang="en-US" dirty="0" smtClean="0">
+            <a:endParaRPr lang="en-US" dirty="0">
               <a:latin typeface="Poppins" charset="0"/>
               <a:cs typeface="Poppins" charset="0"/>
             </a:endParaRPr>
@@ -10973,7 +10815,7 @@
           <a:lstStyle/>
           <a:p>
             <a:r>
-              <a:rPr lang="en-US" b="1" dirty="0" smtClean="0">
+              <a:rPr lang="en-US" b="1" dirty="0">
                 <a:solidFill>
                   <a:schemeClr val="dk1"/>
                 </a:solidFill>
@@ -10985,16 +10827,12 @@
               <a:t>Output</a:t>
             </a:r>
             <a:r>
-              <a:rPr lang="en-US" sz="900" b="1" dirty="0" smtClean="0">
+              <a:rPr lang="en-US" sz="900" b="1" dirty="0">
                 <a:latin typeface="Poppins" charset="0"/>
                 <a:cs typeface="Poppins" charset="0"/>
               </a:rPr>
               <a:t>: </a:t>
             </a:r>
-            <a:endParaRPr lang="en-US" sz="900" b="1" dirty="0">
-              <a:latin typeface="Poppins" charset="0"/>
-              <a:cs typeface="Poppins" charset="0"/>
-            </a:endParaRPr>
           </a:p>
         </p:txBody>
       </p:sp>
@@ -11051,7 +10889,7 @@
           <a:lstStyle/>
           <a:p>
             <a:r>
-              <a:rPr lang="en-US" b="1" dirty="0" smtClean="0">
+              <a:rPr lang="en-US" b="1" dirty="0">
                 <a:solidFill>
                   <a:schemeClr val="dk1"/>
                 </a:solidFill>
@@ -11063,14 +10901,14 @@
               <a:t>Analysis: </a:t>
             </a:r>
             <a:r>
-              <a:rPr lang="en-US" dirty="0" smtClean="0">
+              <a:rPr lang="en-US" dirty="0">
                 <a:latin typeface="Poppins" charset="0"/>
                 <a:cs typeface="Poppins" charset="0"/>
               </a:rPr>
               <a:t>80% of high delivery gaps occur in Surface mode, 20% in Express—primarily on routes like</a:t>
             </a:r>
             <a:r>
-              <a:rPr lang="en-US" b="1" dirty="0" smtClean="0">
+              <a:rPr lang="en-US" b="1" dirty="0">
                 <a:solidFill>
                   <a:schemeClr val="dk1"/>
                 </a:solidFill>
@@ -11082,7 +10920,7 @@
               <a:t> Nagpur–Kochi, Chennai–Patna, </a:t>
             </a:r>
             <a:r>
-              <a:rPr lang="en-US" dirty="0" smtClean="0">
+              <a:rPr lang="en-US" dirty="0">
                 <a:latin typeface="Poppins" charset="0"/>
                 <a:cs typeface="Poppins" charset="0"/>
               </a:rPr>
@@ -11090,7 +10928,7 @@
             </a:r>
           </a:p>
           <a:p>
-            <a:endParaRPr lang="en-US" dirty="0" smtClean="0"/>
+            <a:endParaRPr lang="en-US" dirty="0"/>
           </a:p>
           <a:p>
             <a:endParaRPr lang="en-US" dirty="0"/>
@@ -11102,13 +10940,6 @@
   <p:clrMapOvr>
     <a:masterClrMapping/>
   </p:clrMapOvr>
-  <p:timing>
-    <p:tnLst>
-      <p:par>
-        <p:cTn id="1" dur="indefinite" restart="never" nodeType="tmRoot"/>
-      </p:par>
-    </p:tnLst>
-  </p:timing>
 </p:sld>
 </file>
 
